--- a/SIH-PPT.pptx
+++ b/SIH-PPT.pptx
@@ -6638,7 +6638,7 @@
                 <a:ea typeface="Calibri"/>
                 <a:cs typeface="Calibri"/>
               </a:rPr>
-              <a:t>where lightning will strike, every 10 min, up to 6 h ahead</a:t>
+              <a:t>where lightning will strike</a:t>
             </a:r>
             <a:r>
               <a:rPr sz="1000" i="0" b="0">
@@ -6649,7 +6649,7 @@
                 <a:ea typeface="Calibri"/>
                 <a:cs typeface="Calibri"/>
               </a:rPr>
-              <a:t>.</a:t>
+              <a:t>, in 10-min steps to 3 h and hourly to 6 h.</a:t>
             </a:r>
           </a:p>
         </p:txBody>
@@ -7252,7 +7252,7 @@
                 <a:ea typeface="Calibri"/>
                 <a:cs typeface="Calibri"/>
               </a:rPr>
-              <a:t> Tier 1 deep-learning nowcast every 10 min for 0–3 h, then Tier 2 AI-corrected NWP for hours 4–6, switching at the measured crossover hour.</a:t>
+              <a:t> Tier 1 deep-learning nowcast in 10-min steps for 0–3 h, then Tier 2 AI-corrected NWP hourly for hours 4–6, switching at the measured crossover hour.</a:t>
             </a:r>
           </a:p>
         </p:txBody>
@@ -8785,7 +8785,7 @@
                 <a:ea typeface="Calibri"/>
                 <a:cs typeface="Calibri"/>
               </a:rPr>
-              <a:t>0–6 h, every 10 min</a:t>
+              <a:t>10-min steps to 3 h, hourly to 6 h</a:t>
             </a:r>
           </a:p>
         </p:txBody>
@@ -9710,7 +9710,7 @@
                 <a:ea typeface="Calibri"/>
                 <a:cs typeface="Calibri"/>
               </a:rPr>
-              <a:t>, refreshed every 10 min.</a:t>
+              <a:t>: 10-min steps to 3 h, then hourly.</a:t>
             </a:r>
           </a:p>
         </p:txBody>
@@ -11329,7 +11329,7 @@
         </p:nvSpPr>
         <p:spPr>
           <a:xfrm>
-            <a:off x="795528" y="1728216"/>
+            <a:off x="795528" y="1709928"/>
             <a:ext cx="1371599" cy="182880"/>
           </a:xfrm>
           <a:prstGeom prst="rect">
@@ -11364,8 +11364,8 @@
         </p:nvSpPr>
         <p:spPr>
           <a:xfrm>
-            <a:off x="795528" y="1911095"/>
-            <a:ext cx="1371599" cy="201168"/>
+            <a:off x="795528" y="1874520"/>
+            <a:ext cx="1371599" cy="256032"/>
           </a:xfrm>
           <a:prstGeom prst="rect">
             <a:avLst/>
@@ -11376,9 +11376,13 @@
           <a:bodyPr wrap="square" lIns="0" rIns="0" tIns="0" bIns="0" anchor="t"/>
           <a:lstStyle/>
           <a:p>
-            <a:pPr algn="l"/>
-            <a:r>
-              <a:rPr sz="680" i="0" b="0">
+            <a:pPr algn="l">
+              <a:lnSpc>
+                <a:spcPct val="85000"/>
+              </a:lnSpc>
+            </a:pPr>
+            <a:r>
+              <a:rPr sz="630" i="0" b="0">
                 <a:solidFill>
                   <a:srgbClr val="6B7787"/>
                 </a:solidFill>
@@ -11386,7 +11390,7 @@
                 <a:ea typeface="Calibri"/>
                 <a:cs typeface="Calibri"/>
               </a:rPr>
-              <a:t>IMD DWR · NEXRAD VIL</a:t>
+              <a:t>NEXRAD VIL (training); IMD DWR reader built, not yet on live data</a:t>
             </a:r>
           </a:p>
         </p:txBody>
@@ -11517,7 +11521,7 @@
         </p:nvSpPr>
         <p:spPr>
           <a:xfrm>
-            <a:off x="795528" y="2240280"/>
+            <a:off x="795528" y="2221992"/>
             <a:ext cx="1371599" cy="182880"/>
           </a:xfrm>
           <a:prstGeom prst="rect">
@@ -11552,8 +11556,8 @@
         </p:nvSpPr>
         <p:spPr>
           <a:xfrm>
-            <a:off x="795528" y="2423160"/>
-            <a:ext cx="1371599" cy="201168"/>
+            <a:off x="795528" y="2386584"/>
+            <a:ext cx="1371599" cy="256032"/>
           </a:xfrm>
           <a:prstGeom prst="rect">
             <a:avLst/>
@@ -11564,9 +11568,13 @@
           <a:bodyPr wrap="square" lIns="0" rIns="0" tIns="0" bIns="0" anchor="t"/>
           <a:lstStyle/>
           <a:p>
-            <a:pPr algn="l"/>
-            <a:r>
-              <a:rPr sz="680" i="0" b="0">
+            <a:pPr algn="l">
+              <a:lnSpc>
+                <a:spcPct val="85000"/>
+              </a:lnSpc>
+            </a:pPr>
+            <a:r>
+              <a:rPr sz="630" i="0" b="0">
                 <a:solidFill>
                   <a:srgbClr val="6B7787"/>
                 </a:solidFill>
@@ -11705,7 +11713,7 @@
         </p:nvSpPr>
         <p:spPr>
           <a:xfrm>
-            <a:off x="795528" y="2752344"/>
+            <a:off x="795528" y="2734056"/>
             <a:ext cx="1371599" cy="182880"/>
           </a:xfrm>
           <a:prstGeom prst="rect">
@@ -11740,8 +11748,8 @@
         </p:nvSpPr>
         <p:spPr>
           <a:xfrm>
-            <a:off x="795528" y="2935224"/>
-            <a:ext cx="1371599" cy="201168"/>
+            <a:off x="795528" y="2898648"/>
+            <a:ext cx="1371599" cy="256032"/>
           </a:xfrm>
           <a:prstGeom prst="rect">
             <a:avLst/>
@@ -11752,9 +11760,13 @@
           <a:bodyPr wrap="square" lIns="0" rIns="0" tIns="0" bIns="0" anchor="t"/>
           <a:lstStyle/>
           <a:p>
-            <a:pPr algn="l"/>
-            <a:r>
-              <a:rPr sz="680" i="0" b="0">
+            <a:pPr algn="l">
+              <a:lnSpc>
+                <a:spcPct val="85000"/>
+              </a:lnSpc>
+            </a:pPr>
+            <a:r>
+              <a:rPr sz="630" i="0" b="0">
                 <a:solidFill>
                   <a:srgbClr val="6B7787"/>
                 </a:solidFill>
@@ -11762,7 +11774,7 @@
                 <a:ea typeface="Calibri"/>
                 <a:cs typeface="Calibri"/>
               </a:rPr>
-              <a:t>ILDN / strike feeds · GLM</a:t>
+              <a:t>GLM (training); ILDN partnership offered</a:t>
             </a:r>
           </a:p>
         </p:txBody>
@@ -11893,7 +11905,7 @@
         </p:nvSpPr>
         <p:spPr>
           <a:xfrm>
-            <a:off x="795528" y="3264408"/>
+            <a:off x="795528" y="3246120"/>
             <a:ext cx="1371599" cy="182880"/>
           </a:xfrm>
           <a:prstGeom prst="rect">
@@ -11928,8 +11940,8 @@
         </p:nvSpPr>
         <p:spPr>
           <a:xfrm>
-            <a:off x="795528" y="3447288"/>
-            <a:ext cx="1371599" cy="201168"/>
+            <a:off x="795528" y="3410712"/>
+            <a:ext cx="1371599" cy="256032"/>
           </a:xfrm>
           <a:prstGeom prst="rect">
             <a:avLst/>
@@ -11940,9 +11952,13 @@
           <a:bodyPr wrap="square" lIns="0" rIns="0" tIns="0" bIns="0" anchor="t"/>
           <a:lstStyle/>
           <a:p>
-            <a:pPr algn="l"/>
-            <a:r>
-              <a:rPr sz="680" i="0" b="0">
+            <a:pPr algn="l">
+              <a:lnSpc>
+                <a:spcPct val="85000"/>
+              </a:lnSpc>
+            </a:pPr>
+            <a:r>
+              <a:rPr sz="630" i="0" b="0">
                 <a:solidFill>
                   <a:srgbClr val="6B7787"/>
                 </a:solidFill>
@@ -12761,7 +12777,7 @@
                 <a:ea typeface="Segoe UI"/>
                 <a:cs typeface="Segoe UI"/>
               </a:rPr>
-              <a:t> (0–3 h, every 10 min)</a:t>
+              <a:t> (0–3 h, 10-min steps)</a:t>
             </a:r>
           </a:p>
         </p:txBody>
@@ -14789,7 +14805,7 @@
                 <a:ea typeface="Calibri"/>
                 <a:cs typeface="Calibri"/>
               </a:rPr>
-              <a:t> Intensity-weighted radar loss + focal lightning loss; modality dropout; one night on an RTX 4060 Ti.</a:t>
+              <a:t> Intensity-weighted radar loss + focal lightning loss; modality dropout; one night on an RTX 5060 Ti.</a:t>
             </a:r>
           </a:p>
         </p:txBody>
@@ -15323,8 +15339,8 @@
         </p:nvSpPr>
         <p:spPr>
           <a:xfrm>
-            <a:off x="4197096" y="4169663"/>
-            <a:ext cx="4261104" cy="146304"/>
+            <a:off x="4197096" y="4160520"/>
+            <a:ext cx="4261104" cy="274320"/>
           </a:xfrm>
           <a:prstGeom prst="rect">
             <a:avLst/>
@@ -15335,9 +15351,13 @@
           <a:bodyPr wrap="square" lIns="0" rIns="0" tIns="0" bIns="0" anchor="t"/>
           <a:lstStyle/>
           <a:p>
-            <a:pPr algn="l"/>
-            <a:r>
-              <a:rPr sz="730" i="0" b="1">
+            <a:pPr algn="l">
+              <a:lnSpc>
+                <a:spcPct val="90000"/>
+              </a:lnSpc>
+            </a:pPr>
+            <a:r>
+              <a:rPr sz="710" i="0" b="1">
                 <a:solidFill>
                   <a:srgbClr val="1B2533"/>
                 </a:solidFill>
@@ -15348,7 +15368,7 @@
               <a:t>Held-out US storm:</a:t>
             </a:r>
             <a:r>
-              <a:rPr sz="730" i="0" b="0">
+              <a:rPr sz="710" i="0" b="0">
                 <a:solidFill>
                   <a:srgbClr val="6B7787"/>
                 </a:solidFill>
@@ -15357,6 +15377,57 @@
                 <a:cs typeface="Calibri"/>
               </a:rPr>
               <a:t> forecast lightning chance (shading) vs observed flashes (o)</a:t>
+            </a:r>
+          </a:p>
+          <a:p>
+            <a:pPr algn="l">
+              <a:lnSpc>
+                <a:spcPct val="90000"/>
+              </a:lnSpc>
+            </a:pPr>
+            <a:r>
+              <a:rPr sz="710" i="0" b="1">
+                <a:solidFill>
+                  <a:srgbClr val="1B2533"/>
+                </a:solidFill>
+                <a:latin typeface="Calibri"/>
+                <a:ea typeface="Calibri"/>
+                <a:cs typeface="Calibri"/>
+              </a:rPr>
+              <a:t>Oklahoma City, 26 Aug 2019:</a:t>
+            </a:r>
+            <a:r>
+              <a:rPr sz="710" i="0" b="0">
+                <a:solidFill>
+                  <a:srgbClr val="6B7787"/>
+                </a:solidFill>
+                <a:latin typeface="Calibri"/>
+                <a:ea typeface="Calibri"/>
+                <a:cs typeface="Calibri"/>
+              </a:rPr>
+              <a:t> CSI </a:t>
+            </a:r>
+            <a:r>
+              <a:rPr sz="710" i="0" b="1">
+                <a:solidFill>
+                  <a:srgbClr val="1B2533"/>
+                </a:solidFill>
+                <a:latin typeface="Calibri"/>
+                <a:ea typeface="Calibri"/>
+                <a:cs typeface="Calibri"/>
+              </a:rPr>
+              <a:t>0.61 / 0.54 / 0.55</a:t>
+            </a:r>
+            <a:r>
+              <a:rPr sz="710" i="0" b="0">
+                <a:solidFill>
+                  <a:srgbClr val="6B7787"/>
+                </a:solidFill>
+                <a:latin typeface="Calibri"/>
+                <a:ea typeface="Calibri"/>
+                <a:cs typeface="Calibri"/>
+              </a:rPr>
+              <a:t> for hours 1–3 vs persistence 0.52 / 0.33 / 0.18</a:t>
             </a:r>
           </a:p>
         </p:txBody>
@@ -15377,8 +15448,8 @@
         </p:blipFill>
         <p:spPr>
           <a:xfrm>
-            <a:off x="4690771" y="4334256"/>
-            <a:ext cx="3273752" cy="822960"/>
+            <a:off x="4818084" y="4462272"/>
+            <a:ext cx="3019127" cy="758952"/>
           </a:xfrm>
           <a:prstGeom prst="rect">
             <a:avLst/>
@@ -15393,7 +15464,7 @@
         </p:nvSpPr>
         <p:spPr>
           <a:xfrm>
-            <a:off x="4197096" y="5212080"/>
+            <a:off x="4197096" y="5276088"/>
             <a:ext cx="4261104" cy="146304"/>
           </a:xfrm>
           <a:prstGeom prst="rect">
@@ -15447,8 +15518,8 @@
         </p:blipFill>
         <p:spPr>
           <a:xfrm>
-            <a:off x="5022934" y="5376672"/>
-            <a:ext cx="2609426" cy="841248"/>
+            <a:off x="5122206" y="5440679"/>
+            <a:ext cx="2410883" cy="777240"/>
           </a:xfrm>
           <a:prstGeom prst="rect">
             <a:avLst/>
@@ -15909,7 +15980,7 @@
         <p:spPr>
           <a:xfrm>
             <a:off x="10312603" y="4370831"/>
-            <a:ext cx="1170432" cy="192024"/>
+            <a:ext cx="351129" cy="192024"/>
           </a:xfrm>
           <a:prstGeom prst="roundRect">
             <a:avLst>
@@ -15953,7 +16024,7 @@
         <p:spPr>
           <a:xfrm>
             <a:off x="10312603" y="4370831"/>
-            <a:ext cx="1170432" cy="192024"/>
+            <a:ext cx="351129" cy="192024"/>
           </a:xfrm>
           <a:prstGeom prst="rect">
             <a:avLst/>
@@ -15974,7 +16045,7 @@
                 <a:ea typeface="Segoe UI"/>
                 <a:cs typeface="Segoe UI"/>
               </a:rPr>
-              <a:t>bf16 + torch.compile</a:t>
+              <a:t>bf16</a:t>
             </a:r>
           </a:p>
         </p:txBody>
@@ -17041,7 +17112,7 @@
         <p:spPr>
           <a:xfrm>
             <a:off x="10674705" y="5660135"/>
-            <a:ext cx="760780" cy="192024"/>
+            <a:ext cx="1119225" cy="192024"/>
           </a:xfrm>
           <a:prstGeom prst="roundRect">
             <a:avLst>
@@ -17085,7 +17156,7 @@
         <p:spPr>
           <a:xfrm>
             <a:off x="10674705" y="5660135"/>
-            <a:ext cx="760780" cy="192024"/>
+            <a:ext cx="1119225" cy="192024"/>
           </a:xfrm>
           <a:prstGeom prst="rect">
             <a:avLst/>
@@ -17106,86 +17177,7 @@
                 <a:ea typeface="Segoe UI"/>
                 <a:cs typeface="Segoe UI"/>
               </a:rPr>
-              <a:t>Hugging Face</a:t>
-            </a:r>
-          </a:p>
-        </p:txBody>
-      </p:sp>
-      <p:sp>
-        <p:nvSpPr>
-          <p:cNvPr id="17568" name="Rounded Rectangle 17567"/>
-          <p:cNvSpPr/>
-          <p:nvPr/>
-        </p:nvSpPr>
-        <p:spPr>
-          <a:xfrm>
-            <a:off x="8787384" y="5879591"/>
-            <a:ext cx="1068019" cy="192024"/>
-          </a:xfrm>
-          <a:prstGeom prst="roundRect">
-            <a:avLst>
-              <a:gd name="adj" fmla="val 50000"/>
-            </a:avLst>
-          </a:prstGeom>
-          <a:solidFill>
-            <a:srgbClr val="FDEBDD"/>
-          </a:solidFill>
-          <a:ln>
-            <a:noFill/>
-          </a:ln>
-          <a:effectLst/>
-        </p:spPr>
-        <p:style>
-          <a:lnRef idx="1">
-            <a:schemeClr val="accent1"/>
-          </a:lnRef>
-          <a:fillRef idx="3">
-            <a:schemeClr val="accent1"/>
-          </a:fillRef>
-          <a:effectRef idx="2">
-            <a:schemeClr val="accent1"/>
-          </a:effectRef>
-          <a:fontRef idx="minor">
-            <a:schemeClr val="lt1"/>
-          </a:fontRef>
-        </p:style>
-        <p:txBody>
-          <a:bodyPr rtlCol="0" anchor="ctr"/>
-          <a:lstStyle/>
-          <a:p/>
-        </p:txBody>
-      </p:sp>
-      <p:sp>
-        <p:nvSpPr>
-          <p:cNvPr id="17569" name="TextBox 17568"/>
-          <p:cNvSpPr txBox="1"/>
-          <p:nvPr/>
-        </p:nvSpPr>
-        <p:spPr>
-          <a:xfrm>
-            <a:off x="8787384" y="5879591"/>
-            <a:ext cx="1068019" cy="192024"/>
-          </a:xfrm>
-          <a:prstGeom prst="rect">
-            <a:avLst/>
-          </a:prstGeom>
-          <a:noFill/>
-        </p:spPr>
-        <p:txBody>
-          <a:bodyPr wrap="square" lIns="0" rIns="0" tIns="0" bIns="0" anchor="ctr"/>
-          <a:lstStyle/>
-          <a:p>
-            <a:pPr algn="ctr"/>
-            <a:r>
-              <a:rPr sz="720" i="0" b="1">
-                <a:solidFill>
-                  <a:srgbClr val="1B2533"/>
-                </a:solidFill>
-                <a:latin typeface="Segoe UI"/>
-                <a:ea typeface="Segoe UI"/>
-                <a:cs typeface="Segoe UI"/>
-              </a:rPr>
-              <a:t>RTX 4060 Ti / 5090</a:t>
+              <a:t>RTX 5060 Ti (16 GB)</a:t>
             </a:r>
           </a:p>
         </p:txBody>
@@ -18073,7 +18065,7 @@
                 <a:ea typeface="Calibri"/>
                 <a:cs typeface="Calibri"/>
               </a:rPr>
-              <a:t> a full 0–6 h forecast for an Indian city in </a:t>
+              <a:t> a full 0–6 h forecast takes </a:t>
             </a:r>
             <a:r>
               <a:rPr sz="850" i="0" b="1">
@@ -18084,7 +18076,7 @@
                 <a:ea typeface="Calibri"/>
                 <a:cs typeface="Calibri"/>
               </a:rPr>
-              <a:t>about 1 minute</a:t>
+              <a:t>a few minutes per city</a:t>
             </a:r>
             <a:r>
               <a:rPr sz="850" i="0" b="0">
@@ -18095,7 +18087,7 @@
                 <a:ea typeface="Calibri"/>
                 <a:cs typeface="Calibri"/>
               </a:rPr>
-              <a:t>, data download included.</a:t>
+              <a:t>, mostly data download; the model itself runs in seconds.</a:t>
             </a:r>
           </a:p>
         </p:txBody>
@@ -18824,7 +18816,7 @@
                 <a:ea typeface="Calibri"/>
                 <a:cs typeface="Calibri"/>
               </a:rPr>
-              <a:t>Indian data readers ready:</a:t>
+              <a:t>Indian data readers:</a:t>
             </a:r>
             <a:r>
               <a:rPr sz="850" i="0" b="0">
@@ -18835,7 +18827,29 @@
                 <a:ea typeface="Calibri"/>
                 <a:cs typeface="Calibri"/>
               </a:rPr>
-              <a:t> INSAT-3DR/3DS (MOSDAC), IMD Doppler radar, GFS and lightning strike feeds.</a:t>
+              <a:t> INSAT, IMD radar, GFS and strike feeds; </a:t>
+            </a:r>
+            <a:r>
+              <a:rPr sz="850" i="0" b="1">
+                <a:solidFill>
+                  <a:srgbClr val="1B2533"/>
+                </a:solidFill>
+                <a:latin typeface="Calibri"/>
+                <a:ea typeface="Calibri"/>
+                <a:cs typeface="Calibri"/>
+              </a:rPr>
+              <a:t>INSAT and GFS verified on real files</a:t>
+            </a:r>
+            <a:r>
+              <a:rPr sz="850" i="0" b="0">
+                <a:solidFill>
+                  <a:srgbClr val="3D4A5C"/>
+                </a:solidFill>
+                <a:latin typeface="Calibri"/>
+                <a:ea typeface="Calibri"/>
+                <a:cs typeface="Calibri"/>
+              </a:rPr>
+              <a:t>.</a:t>
             </a:r>
           </a:p>
         </p:txBody>
@@ -18998,7 +19012,7 @@
                 <a:ea typeface="Calibri"/>
                 <a:cs typeface="Calibri"/>
               </a:rPr>
-              <a:t>Verified on real files:</a:t>
+              <a:t>INSAT cross-checked:</a:t>
             </a:r>
             <a:r>
               <a:rPr sz="850" i="0" b="0">
@@ -20053,7 +20067,7 @@
                 <a:ea typeface="Calibri"/>
                 <a:cs typeface="Calibri"/>
               </a:rPr>
-              <a:t> ≈30 tiles of 384 km cover India; at ~1 min per tile, one GPU refreshes the whole country in about 30 min.</a:t>
+              <a:t> ≈30 tiles of 384 km cover India, and one GPU can refresh them all.</a:t>
             </a:r>
           </a:p>
         </p:txBody>
@@ -20905,7 +20919,7 @@
                 <a:ea typeface="Calibri"/>
                 <a:cs typeface="Calibri"/>
               </a:rPr>
-              <a:t>Gets better as validated data arrives:</a:t>
+              <a:t>Improves with Indian data:</a:t>
             </a:r>
             <a:r>
               <a:rPr sz="860" i="0" b="0">
@@ -20916,7 +20930,7 @@
                 <a:ea typeface="Calibri"/>
                 <a:cs typeface="Calibri"/>
               </a:rPr>
-              <a:t> ILDN data is requested and every output carries an honest label. </a:t>
+              <a:t> ILDN (Tripura University) has offered to partner and share lightning data for SIH-2026; </a:t>
             </a:r>
             <a:r>
               <a:rPr sz="860" i="0" b="1">
@@ -20927,7 +20941,7 @@
                 <a:ea typeface="Calibri"/>
                 <a:cs typeface="Calibri"/>
               </a:rPr>
-              <a:t>As the model gets validated Indian data, it recalibrates and becomes more accurate.</a:t>
+              <a:t>as the model gets validated data, it recalibrates and gets more accurate.</a:t>
             </a:r>
           </a:p>
         </p:txBody>
@@ -24095,7 +24109,7 @@
                 <a:ea typeface="Calibri"/>
                 <a:cs typeface="Calibri"/>
               </a:rPr>
-              <a:t>Auto-updated </a:t>
+              <a:t>Storm and lightning maps in </a:t>
             </a:r>
             <a:r>
               <a:rPr sz="830" i="0" b="1">
@@ -24106,7 +24120,7 @@
                 <a:ea typeface="Calibri"/>
                 <a:cs typeface="Calibri"/>
               </a:rPr>
-              <a:t>10-min, 2 km</a:t>
+              <a:t>10-min steps at 2 km</a:t>
             </a:r>
             <a:r>
               <a:rPr sz="830" i="0" b="0">
@@ -24117,7 +24131,7 @@
                 <a:ea typeface="Calibri"/>
                 <a:cs typeface="Calibri"/>
               </a:rPr>
-              <a:t> storm and lightning maps. </a:t>
+              <a:t>. </a:t>
             </a:r>
             <a:r>
               <a:rPr sz="830" i="0" b="1">
@@ -26161,26 +26175,26 @@
               </a:lnSpc>
             </a:pPr>
             <a:r>
-              <a:rPr sz="830" i="0" b="0">
-                <a:solidFill>
-                  <a:srgbClr val="3D4A5C"/>
+              <a:rPr sz="830" i="0" b="1">
+                <a:solidFill>
+                  <a:srgbClr val="1B2533"/>
                 </a:solidFill>
                 <a:latin typeface="Calibri"/>
                 <a:ea typeface="Calibri"/>
                 <a:cs typeface="Calibri"/>
               </a:rPr>
-              <a:t>“Storm in the next hour” alerts. </a:t>
-            </a:r>
-            <a:r>
-              <a:rPr sz="830" i="0" b="1">
-                <a:solidFill>
-                  <a:srgbClr val="1B2533"/>
+              <a:t>Tested on Bhubaneswar, Kolkata and Guwahati storms</a:t>
+            </a:r>
+            <a:r>
+              <a:rPr sz="830" i="0" b="0">
+                <a:solidFill>
+                  <a:srgbClr val="3D4A5C"/>
                 </a:solidFill>
                 <a:latin typeface="Calibri"/>
                 <a:ea typeface="Calibri"/>
                 <a:cs typeface="Calibri"/>
               </a:rPr>
-              <a:t>Tested on Bhubaneswar, Kolkata and Delhi storms.</a:t>
+              <a:t>, plus a dry-day control in Delhi.</a:t>
             </a:r>
           </a:p>
         </p:txBody>
@@ -27450,7 +27464,7 @@
                 <a:ea typeface="Calibri"/>
                 <a:cs typeface="Calibri"/>
               </a:rPr>
-              <a:t>updates every 10 min · 2 km radar grid</a:t>
+              <a:t>10-min steps to 3 h · hourly to 6 h</a:t>
             </a:r>
           </a:p>
         </p:txBody>
@@ -32162,7 +32176,7 @@
                 <a:ea typeface="Calibri"/>
                 <a:cs typeface="Calibri"/>
               </a:rPr>
-              <a:t>, ESSD 18, 5773 (2026), CC-BY 4.0 · </a:t>
+              <a:t>, Zhang et al., ESSD 18, 5773–5791 (2026), CC-BY 4.0 · </a:t>
             </a:r>
             <a:r>
               <a:rPr sz="819" i="0" b="0" u="sng">
@@ -32174,7 +32188,7 @@
                 <a:cs typeface="Calibri"/>
                 <a:hlinkClick r:id="rId10"/>
               </a:rPr>
-              <a:t>paper</a:t>
+              <a:t>doi:10.5194/essd-18-5773-2026</a:t>
             </a:r>
             <a:r>
               <a:rPr sz="819" i="0" b="0">
@@ -32744,7 +32758,7 @@
                 <a:ea typeface="Segoe UI"/>
                 <a:cs typeface="Segoe UI"/>
               </a:rPr>
-              <a:t>ASKED</a:t>
+              <a:t>PARTNER</a:t>
             </a:r>
           </a:p>
         </p:txBody>
@@ -32794,7 +32808,7 @@
                 <a:ea typeface="Calibri"/>
                 <a:cs typeface="Calibri"/>
               </a:rPr>
-              <a:t> Indian Lightning Detection Network, CeLTS, Tripura University: data requested · </a:t>
+              <a:t> Indian Lightning Detection Network, CeLTS, Tripura University: partnership offered (Sep 2026) · </a:t>
             </a:r>
             <a:r>
               <a:rPr sz="819" i="0" b="0" u="sng">

--- a/SIH-PPT.pptx
+++ b/SIH-PPT.pptx
@@ -15701,14 +15701,58 @@
       </p:sp>
       <p:sp>
         <p:nvSpPr>
-          <p:cNvPr id="17530" name="TextBox 17529"/>
+          <p:cNvPr id="17530" name="Rounded Rectangle 17529"/>
+          <p:cNvSpPr/>
+          <p:nvPr/>
+        </p:nvSpPr>
+        <p:spPr>
+          <a:xfrm>
+            <a:off x="8769096" y="4206240"/>
+            <a:ext cx="512064" cy="443484"/>
+          </a:xfrm>
+          <a:prstGeom prst="roundRect">
+            <a:avLst>
+              <a:gd name="adj" fmla="val 18000"/>
+            </a:avLst>
+          </a:prstGeom>
+          <a:solidFill>
+            <a:srgbClr val="1565C0"/>
+          </a:solidFill>
+          <a:ln>
+            <a:noFill/>
+          </a:ln>
+          <a:effectLst/>
+        </p:spPr>
+        <p:style>
+          <a:lnRef idx="1">
+            <a:schemeClr val="accent1"/>
+          </a:lnRef>
+          <a:fillRef idx="3">
+            <a:schemeClr val="accent1"/>
+          </a:fillRef>
+          <a:effectRef idx="2">
+            <a:schemeClr val="accent1"/>
+          </a:effectRef>
+          <a:fontRef idx="minor">
+            <a:schemeClr val="lt1"/>
+          </a:fontRef>
+        </p:style>
+        <p:txBody>
+          <a:bodyPr rtlCol="0" anchor="ctr"/>
+          <a:lstStyle/>
+          <a:p/>
+        </p:txBody>
+      </p:sp>
+      <p:sp>
+        <p:nvSpPr>
+          <p:cNvPr id="17531" name="TextBox 17530"/>
           <p:cNvSpPr txBox="1"/>
           <p:nvPr/>
         </p:nvSpPr>
         <p:spPr>
           <a:xfrm>
-            <a:off x="8787384" y="4206240"/>
-            <a:ext cx="3099815" cy="146304"/>
+            <a:off x="8769096" y="4206240"/>
+            <a:ext cx="512064" cy="443484"/>
           </a:xfrm>
           <a:prstGeom prst="rect">
             <a:avLst/>
@@ -15716,14 +15760,14 @@
           <a:noFill/>
         </p:spPr>
         <p:txBody>
-          <a:bodyPr wrap="square" lIns="0" rIns="0" tIns="0" bIns="0" anchor="t"/>
-          <a:lstStyle/>
-          <a:p>
-            <a:pPr algn="l"/>
-            <a:r>
-              <a:rPr sz="700" i="0" b="1">
-                <a:solidFill>
-                  <a:srgbClr val="1565C0"/>
+          <a:bodyPr wrap="square" lIns="0" rIns="0" tIns="0" bIns="0" anchor="ctr"/>
+          <a:lstStyle/>
+          <a:p>
+            <a:pPr algn="ctr"/>
+            <a:r>
+              <a:rPr sz="750" i="0" b="1">
+                <a:solidFill>
+                  <a:srgbClr val="FFFFFF"/>
                 </a:solidFill>
                 <a:latin typeface="Segoe UI"/>
                 <a:ea typeface="Segoe UI"/>
@@ -15736,18 +15780,333 @@
       </p:sp>
       <p:sp>
         <p:nvSpPr>
-          <p:cNvPr id="17531" name="Rounded Rectangle 17530"/>
+          <p:cNvPr id="17532" name="Rounded Rectangle 17531"/>
           <p:cNvSpPr/>
           <p:nvPr/>
         </p:nvSpPr>
         <p:spPr>
           <a:xfrm>
-            <a:off x="8787384" y="4370831"/>
-            <a:ext cx="453542" cy="192024"/>
+            <a:off x="9336024" y="4206240"/>
+            <a:ext cx="592073" cy="443484"/>
           </a:xfrm>
           <a:prstGeom prst="roundRect">
             <a:avLst>
-              <a:gd name="adj" fmla="val 50000"/>
+              <a:gd name="adj" fmla="val 18000"/>
+            </a:avLst>
+          </a:prstGeom>
+          <a:solidFill>
+            <a:srgbClr val="FFFFFF"/>
+          </a:solidFill>
+          <a:ln w="9525">
+            <a:solidFill>
+              <a:srgbClr val="D9E2EE"/>
+            </a:solidFill>
+          </a:ln>
+          <a:effectLst/>
+        </p:spPr>
+        <p:style>
+          <a:lnRef idx="1">
+            <a:schemeClr val="accent1"/>
+          </a:lnRef>
+          <a:fillRef idx="3">
+            <a:schemeClr val="accent1"/>
+          </a:fillRef>
+          <a:effectRef idx="2">
+            <a:schemeClr val="accent1"/>
+          </a:effectRef>
+          <a:fontRef idx="minor">
+            <a:schemeClr val="lt1"/>
+          </a:fontRef>
+        </p:style>
+        <p:txBody>
+          <a:bodyPr rtlCol="0" anchor="ctr"/>
+          <a:lstStyle/>
+          <a:p/>
+        </p:txBody>
+      </p:sp>
+      <p:pic>
+        <p:nvPicPr>
+          <p:cNvPr id="17533" name="Picture 17532" descr="python.png"/>
+          <p:cNvPicPr>
+            <a:picLocks noChangeAspect="1"/>
+          </p:cNvPicPr>
+          <p:nvPr/>
+        </p:nvPicPr>
+        <p:blipFill>
+          <a:blip r:embed="rId22"/>
+          <a:stretch>
+            <a:fillRect/>
+          </a:stretch>
+        </p:blipFill>
+        <p:spPr>
+          <a:xfrm>
+            <a:off x="9514935" y="4242816"/>
+            <a:ext cx="234250" cy="260604"/>
+          </a:xfrm>
+          <a:prstGeom prst="rect">
+            <a:avLst/>
+          </a:prstGeom>
+        </p:spPr>
+      </p:pic>
+      <p:sp>
+        <p:nvSpPr>
+          <p:cNvPr id="17534" name="TextBox 17533"/>
+          <p:cNvSpPr txBox="1"/>
+          <p:nvPr/>
+        </p:nvSpPr>
+        <p:spPr>
+          <a:xfrm>
+            <a:off x="9354312" y="4512564"/>
+            <a:ext cx="555497" cy="118872"/>
+          </a:xfrm>
+          <a:prstGeom prst="rect">
+            <a:avLst/>
+          </a:prstGeom>
+          <a:noFill/>
+        </p:spPr>
+        <p:txBody>
+          <a:bodyPr wrap="square" lIns="0" rIns="0" tIns="0" bIns="0" anchor="ctr"/>
+          <a:lstStyle/>
+          <a:p>
+            <a:pPr algn="ctr"/>
+            <a:r>
+              <a:rPr sz="600" i="0" b="1">
+                <a:solidFill>
+                  <a:srgbClr val="3D4A5C"/>
+                </a:solidFill>
+                <a:latin typeface="Segoe UI"/>
+                <a:ea typeface="Segoe UI"/>
+                <a:cs typeface="Segoe UI"/>
+              </a:rPr>
+              <a:t>Python</a:t>
+            </a:r>
+          </a:p>
+        </p:txBody>
+      </p:sp>
+      <p:sp>
+        <p:nvSpPr>
+          <p:cNvPr id="17535" name="Rounded Rectangle 17534"/>
+          <p:cNvSpPr/>
+          <p:nvPr/>
+        </p:nvSpPr>
+        <p:spPr>
+          <a:xfrm>
+            <a:off x="9982962" y="4206240"/>
+            <a:ext cx="592073" cy="443484"/>
+          </a:xfrm>
+          <a:prstGeom prst="roundRect">
+            <a:avLst>
+              <a:gd name="adj" fmla="val 18000"/>
+            </a:avLst>
+          </a:prstGeom>
+          <a:solidFill>
+            <a:srgbClr val="FFFFFF"/>
+          </a:solidFill>
+          <a:ln w="9525">
+            <a:solidFill>
+              <a:srgbClr val="D9E2EE"/>
+            </a:solidFill>
+          </a:ln>
+          <a:effectLst/>
+        </p:spPr>
+        <p:style>
+          <a:lnRef idx="1">
+            <a:schemeClr val="accent1"/>
+          </a:lnRef>
+          <a:fillRef idx="3">
+            <a:schemeClr val="accent1"/>
+          </a:fillRef>
+          <a:effectRef idx="2">
+            <a:schemeClr val="accent1"/>
+          </a:effectRef>
+          <a:fontRef idx="minor">
+            <a:schemeClr val="lt1"/>
+          </a:fontRef>
+        </p:style>
+        <p:txBody>
+          <a:bodyPr rtlCol="0" anchor="ctr"/>
+          <a:lstStyle/>
+          <a:p/>
+        </p:txBody>
+      </p:sp>
+      <p:pic>
+        <p:nvPicPr>
+          <p:cNvPr id="17536" name="Picture 17535" descr="pytorch.png"/>
+          <p:cNvPicPr>
+            <a:picLocks noChangeAspect="1"/>
+          </p:cNvPicPr>
+          <p:nvPr/>
+        </p:nvPicPr>
+        <p:blipFill>
+          <a:blip r:embed="rId23"/>
+          <a:stretch>
+            <a:fillRect/>
+          </a:stretch>
+        </p:blipFill>
+        <p:spPr>
+          <a:xfrm>
+            <a:off x="10171008" y="4242816"/>
+            <a:ext cx="215980" cy="260604"/>
+          </a:xfrm>
+          <a:prstGeom prst="rect">
+            <a:avLst/>
+          </a:prstGeom>
+        </p:spPr>
+      </p:pic>
+      <p:sp>
+        <p:nvSpPr>
+          <p:cNvPr id="17537" name="TextBox 17536"/>
+          <p:cNvSpPr txBox="1"/>
+          <p:nvPr/>
+        </p:nvSpPr>
+        <p:spPr>
+          <a:xfrm>
+            <a:off x="10001250" y="4512564"/>
+            <a:ext cx="555497" cy="118872"/>
+          </a:xfrm>
+          <a:prstGeom prst="rect">
+            <a:avLst/>
+          </a:prstGeom>
+          <a:noFill/>
+        </p:spPr>
+        <p:txBody>
+          <a:bodyPr wrap="square" lIns="0" rIns="0" tIns="0" bIns="0" anchor="ctr"/>
+          <a:lstStyle/>
+          <a:p>
+            <a:pPr algn="ctr"/>
+            <a:r>
+              <a:rPr sz="600" i="0" b="1">
+                <a:solidFill>
+                  <a:srgbClr val="3D4A5C"/>
+                </a:solidFill>
+                <a:latin typeface="Segoe UI"/>
+                <a:ea typeface="Segoe UI"/>
+                <a:cs typeface="Segoe UI"/>
+              </a:rPr>
+              <a:t>PyTorch</a:t>
+            </a:r>
+          </a:p>
+        </p:txBody>
+      </p:sp>
+      <p:sp>
+        <p:nvSpPr>
+          <p:cNvPr id="17538" name="Rounded Rectangle 17537"/>
+          <p:cNvSpPr/>
+          <p:nvPr/>
+        </p:nvSpPr>
+        <p:spPr>
+          <a:xfrm>
+            <a:off x="10629900" y="4206240"/>
+            <a:ext cx="592073" cy="443484"/>
+          </a:xfrm>
+          <a:prstGeom prst="roundRect">
+            <a:avLst>
+              <a:gd name="adj" fmla="val 18000"/>
+            </a:avLst>
+          </a:prstGeom>
+          <a:solidFill>
+            <a:srgbClr val="FFFFFF"/>
+          </a:solidFill>
+          <a:ln w="9525">
+            <a:solidFill>
+              <a:srgbClr val="D9E2EE"/>
+            </a:solidFill>
+          </a:ln>
+          <a:effectLst/>
+        </p:spPr>
+        <p:style>
+          <a:lnRef idx="1">
+            <a:schemeClr val="accent1"/>
+          </a:lnRef>
+          <a:fillRef idx="3">
+            <a:schemeClr val="accent1"/>
+          </a:fillRef>
+          <a:effectRef idx="2">
+            <a:schemeClr val="accent1"/>
+          </a:effectRef>
+          <a:fontRef idx="minor">
+            <a:schemeClr val="lt1"/>
+          </a:fontRef>
+        </p:style>
+        <p:txBody>
+          <a:bodyPr rtlCol="0" anchor="ctr"/>
+          <a:lstStyle/>
+          <a:p/>
+        </p:txBody>
+      </p:sp>
+      <p:pic>
+        <p:nvPicPr>
+          <p:cNvPr id="17539" name="Picture 17538" descr="numpy.png"/>
+          <p:cNvPicPr>
+            <a:picLocks noChangeAspect="1"/>
+          </p:cNvPicPr>
+          <p:nvPr/>
+        </p:nvPicPr>
+        <p:blipFill>
+          <a:blip r:embed="rId24"/>
+          <a:stretch>
+            <a:fillRect/>
+          </a:stretch>
+        </p:blipFill>
+        <p:spPr>
+          <a:xfrm>
+            <a:off x="10803453" y="4242816"/>
+            <a:ext cx="244967" cy="260604"/>
+          </a:xfrm>
+          <a:prstGeom prst="rect">
+            <a:avLst/>
+          </a:prstGeom>
+        </p:spPr>
+      </p:pic>
+      <p:sp>
+        <p:nvSpPr>
+          <p:cNvPr id="17540" name="TextBox 17539"/>
+          <p:cNvSpPr txBox="1"/>
+          <p:nvPr/>
+        </p:nvSpPr>
+        <p:spPr>
+          <a:xfrm>
+            <a:off x="10648188" y="4512564"/>
+            <a:ext cx="555497" cy="118872"/>
+          </a:xfrm>
+          <a:prstGeom prst="rect">
+            <a:avLst/>
+          </a:prstGeom>
+          <a:noFill/>
+        </p:spPr>
+        <p:txBody>
+          <a:bodyPr wrap="square" lIns="0" rIns="0" tIns="0" bIns="0" anchor="ctr"/>
+          <a:lstStyle/>
+          <a:p>
+            <a:pPr algn="ctr"/>
+            <a:r>
+              <a:rPr sz="600" i="0" b="1">
+                <a:solidFill>
+                  <a:srgbClr val="3D4A5C"/>
+                </a:solidFill>
+                <a:latin typeface="Segoe UI"/>
+                <a:ea typeface="Segoe UI"/>
+                <a:cs typeface="Segoe UI"/>
+              </a:rPr>
+              <a:t>NumPy</a:t>
+            </a:r>
+          </a:p>
+        </p:txBody>
+      </p:sp>
+      <p:sp>
+        <p:nvSpPr>
+          <p:cNvPr id="17541" name="Rounded Rectangle 17540"/>
+          <p:cNvSpPr/>
+          <p:nvPr/>
+        </p:nvSpPr>
+        <p:spPr>
+          <a:xfrm>
+            <a:off x="11276838" y="4206240"/>
+            <a:ext cx="592073" cy="443484"/>
+          </a:xfrm>
+          <a:prstGeom prst="roundRect">
+            <a:avLst>
+              <a:gd name="adj" fmla="val 18000"/>
             </a:avLst>
           </a:prstGeom>
           <a:solidFill>
@@ -15780,14 +16139,14 @@
       </p:sp>
       <p:sp>
         <p:nvSpPr>
-          <p:cNvPr id="17532" name="TextBox 17531"/>
+          <p:cNvPr id="17542" name="TextBox 17541"/>
           <p:cNvSpPr txBox="1"/>
           <p:nvPr/>
         </p:nvSpPr>
         <p:spPr>
           <a:xfrm>
-            <a:off x="8787384" y="4370831"/>
-            <a:ext cx="453542" cy="192024"/>
+            <a:off x="11304269" y="4206240"/>
+            <a:ext cx="537209" cy="443484"/>
           </a:xfrm>
           <a:prstGeom prst="rect">
             <a:avLst/>
@@ -15798,9 +16157,13 @@
           <a:bodyPr wrap="square" lIns="0" rIns="0" tIns="0" bIns="0" anchor="ctr"/>
           <a:lstStyle/>
           <a:p>
-            <a:pPr algn="ctr"/>
-            <a:r>
-              <a:rPr sz="720" i="0" b="1">
+            <a:pPr algn="ctr">
+              <a:lnSpc>
+                <a:spcPct val="90000"/>
+              </a:lnSpc>
+            </a:pPr>
+            <a:r>
+              <a:rPr sz="680" i="0" b="1">
                 <a:solidFill>
                   <a:srgbClr val="1B2533"/>
                 </a:solidFill>
@@ -15808,29 +16171,29 @@
                 <a:ea typeface="Segoe UI"/>
                 <a:cs typeface="Segoe UI"/>
               </a:rPr>
-              <a:t>Python</a:t>
-            </a:r>
-          </a:p>
-        </p:txBody>
-      </p:sp>
-      <p:sp>
-        <p:nvSpPr>
-          <p:cNvPr id="17533" name="Rounded Rectangle 17532"/>
+              <a:t>bf16 training</a:t>
+            </a:r>
+          </a:p>
+        </p:txBody>
+      </p:sp>
+      <p:sp>
+        <p:nvSpPr>
+          <p:cNvPr id="17543" name="Rounded Rectangle 17542"/>
           <p:cNvSpPr/>
           <p:nvPr/>
         </p:nvSpPr>
         <p:spPr>
           <a:xfrm>
-            <a:off x="9295790" y="4370831"/>
-            <a:ext cx="504748" cy="192024"/>
+            <a:off x="8769096" y="4704588"/>
+            <a:ext cx="512064" cy="443484"/>
           </a:xfrm>
           <a:prstGeom prst="roundRect">
             <a:avLst>
-              <a:gd name="adj" fmla="val 50000"/>
+              <a:gd name="adj" fmla="val 18000"/>
             </a:avLst>
           </a:prstGeom>
           <a:solidFill>
-            <a:srgbClr val="E3EEFB"/>
+            <a:srgbClr val="138808"/>
           </a:solidFill>
           <a:ln>
             <a:noFill/>
@@ -15859,14 +16222,14 @@
       </p:sp>
       <p:sp>
         <p:nvSpPr>
-          <p:cNvPr id="17534" name="TextBox 17533"/>
+          <p:cNvPr id="17544" name="TextBox 17543"/>
           <p:cNvSpPr txBox="1"/>
           <p:nvPr/>
         </p:nvSpPr>
         <p:spPr>
           <a:xfrm>
-            <a:off x="9295790" y="4370831"/>
-            <a:ext cx="504748" cy="192024"/>
+            <a:off x="8769096" y="4704588"/>
+            <a:ext cx="512064" cy="443484"/>
           </a:xfrm>
           <a:prstGeom prst="rect">
             <a:avLst/>
@@ -15879,40 +16242,42 @@
           <a:p>
             <a:pPr algn="ctr"/>
             <a:r>
-              <a:rPr sz="720" i="0" b="1">
-                <a:solidFill>
-                  <a:srgbClr val="1B2533"/>
+              <a:rPr sz="750" i="0" b="1">
+                <a:solidFill>
+                  <a:srgbClr val="FFFFFF"/>
                 </a:solidFill>
                 <a:latin typeface="Segoe UI"/>
                 <a:ea typeface="Segoe UI"/>
                 <a:cs typeface="Segoe UI"/>
               </a:rPr>
-              <a:t>PyTorch</a:t>
-            </a:r>
-          </a:p>
-        </p:txBody>
-      </p:sp>
-      <p:sp>
-        <p:nvSpPr>
-          <p:cNvPr id="17535" name="Rounded Rectangle 17534"/>
+              <a:t>Data</a:t>
+            </a:r>
+          </a:p>
+        </p:txBody>
+      </p:sp>
+      <p:sp>
+        <p:nvSpPr>
+          <p:cNvPr id="17545" name="Rounded Rectangle 17544"/>
           <p:cNvSpPr/>
           <p:nvPr/>
         </p:nvSpPr>
         <p:spPr>
           <a:xfrm>
-            <a:off x="9855403" y="4370831"/>
-            <a:ext cx="402336" cy="192024"/>
+            <a:off x="9336024" y="4704588"/>
+            <a:ext cx="592073" cy="443484"/>
           </a:xfrm>
           <a:prstGeom prst="roundRect">
             <a:avLst>
-              <a:gd name="adj" fmla="val 50000"/>
+              <a:gd name="adj" fmla="val 18000"/>
             </a:avLst>
           </a:prstGeom>
           <a:solidFill>
-            <a:srgbClr val="E3EEFB"/>
+            <a:srgbClr val="FFFFFF"/>
           </a:solidFill>
-          <a:ln>
-            <a:noFill/>
+          <a:ln w="9525">
+            <a:solidFill>
+              <a:srgbClr val="D9E2EE"/>
+            </a:solidFill>
           </a:ln>
           <a:effectLst/>
         </p:spPr>
@@ -15936,16 +16301,40 @@
           <a:p/>
         </p:txBody>
       </p:sp>
-      <p:sp>
-        <p:nvSpPr>
-          <p:cNvPr id="17536" name="TextBox 17535"/>
+      <p:pic>
+        <p:nvPicPr>
+          <p:cNvPr id="17546" name="Picture 17545" descr="xarray.png"/>
+          <p:cNvPicPr>
+            <a:picLocks noChangeAspect="1"/>
+          </p:cNvPicPr>
+          <p:nvPr/>
+        </p:nvPicPr>
+        <p:blipFill>
+          <a:blip r:embed="rId25"/>
+          <a:stretch>
+            <a:fillRect/>
+          </a:stretch>
+        </p:blipFill>
+        <p:spPr>
+          <a:xfrm>
+            <a:off x="9486460" y="4741164"/>
+            <a:ext cx="291201" cy="260604"/>
+          </a:xfrm>
+          <a:prstGeom prst="rect">
+            <a:avLst/>
+          </a:prstGeom>
+        </p:spPr>
+      </p:pic>
+      <p:sp>
+        <p:nvSpPr>
+          <p:cNvPr id="17547" name="TextBox 17546"/>
           <p:cNvSpPr txBox="1"/>
           <p:nvPr/>
         </p:nvSpPr>
         <p:spPr>
           <a:xfrm>
-            <a:off x="9855403" y="4370831"/>
-            <a:ext cx="402336" cy="192024"/>
+            <a:off x="9354312" y="5010912"/>
+            <a:ext cx="555497" cy="118872"/>
           </a:xfrm>
           <a:prstGeom prst="rect">
             <a:avLst/>
@@ -15958,40 +16347,42 @@
           <a:p>
             <a:pPr algn="ctr"/>
             <a:r>
-              <a:rPr sz="720" i="0" b="1">
-                <a:solidFill>
-                  <a:srgbClr val="1B2533"/>
+              <a:rPr sz="600" i="0" b="1">
+                <a:solidFill>
+                  <a:srgbClr val="3D4A5C"/>
                 </a:solidFill>
                 <a:latin typeface="Segoe UI"/>
                 <a:ea typeface="Segoe UI"/>
                 <a:cs typeface="Segoe UI"/>
               </a:rPr>
-              <a:t>NumPy</a:t>
-            </a:r>
-          </a:p>
-        </p:txBody>
-      </p:sp>
-      <p:sp>
-        <p:nvSpPr>
-          <p:cNvPr id="17537" name="Rounded Rectangle 17536"/>
+              <a:t>xarray</a:t>
+            </a:r>
+          </a:p>
+        </p:txBody>
+      </p:sp>
+      <p:sp>
+        <p:nvSpPr>
+          <p:cNvPr id="17548" name="Rounded Rectangle 17547"/>
           <p:cNvSpPr/>
           <p:nvPr/>
         </p:nvSpPr>
         <p:spPr>
           <a:xfrm>
-            <a:off x="10312603" y="4370831"/>
-            <a:ext cx="351129" cy="192024"/>
+            <a:off x="9982962" y="4704588"/>
+            <a:ext cx="592073" cy="443484"/>
           </a:xfrm>
           <a:prstGeom prst="roundRect">
             <a:avLst>
-              <a:gd name="adj" fmla="val 50000"/>
+              <a:gd name="adj" fmla="val 18000"/>
             </a:avLst>
           </a:prstGeom>
           <a:solidFill>
-            <a:srgbClr val="E3EEFB"/>
+            <a:srgbClr val="FFFFFF"/>
           </a:solidFill>
-          <a:ln>
-            <a:noFill/>
+          <a:ln w="9525">
+            <a:solidFill>
+              <a:srgbClr val="D9E2EE"/>
+            </a:solidFill>
           </a:ln>
           <a:effectLst/>
         </p:spPr>
@@ -16015,16 +16406,40 @@
           <a:p/>
         </p:txBody>
       </p:sp>
-      <p:sp>
-        <p:nvSpPr>
-          <p:cNvPr id="17538" name="TextBox 17537"/>
+      <p:pic>
+        <p:nvPicPr>
+          <p:cNvPr id="17549" name="Picture 17548" descr="herbie.png"/>
+          <p:cNvPicPr>
+            <a:picLocks noChangeAspect="1"/>
+          </p:cNvPicPr>
+          <p:nvPr/>
+        </p:nvPicPr>
+        <p:blipFill>
+          <a:blip r:embed="rId26"/>
+          <a:stretch>
+            <a:fillRect/>
+          </a:stretch>
+        </p:blipFill>
+        <p:spPr>
+          <a:xfrm>
+            <a:off x="10046970" y="4795204"/>
+            <a:ext cx="464057" cy="152522"/>
+          </a:xfrm>
+          <a:prstGeom prst="rect">
+            <a:avLst/>
+          </a:prstGeom>
+        </p:spPr>
+      </p:pic>
+      <p:sp>
+        <p:nvSpPr>
+          <p:cNvPr id="17550" name="TextBox 17549"/>
           <p:cNvSpPr txBox="1"/>
           <p:nvPr/>
         </p:nvSpPr>
         <p:spPr>
           <a:xfrm>
-            <a:off x="10312603" y="4370831"/>
-            <a:ext cx="351129" cy="192024"/>
+            <a:off x="10001250" y="5010912"/>
+            <a:ext cx="555497" cy="118872"/>
           </a:xfrm>
           <a:prstGeom prst="rect">
             <a:avLst/>
@@ -16037,29 +16452,99 @@
           <a:p>
             <a:pPr algn="ctr"/>
             <a:r>
-              <a:rPr sz="720" i="0" b="1">
-                <a:solidFill>
-                  <a:srgbClr val="1B2533"/>
+              <a:rPr sz="600" i="0" b="1">
+                <a:solidFill>
+                  <a:srgbClr val="3D4A5C"/>
                 </a:solidFill>
                 <a:latin typeface="Segoe UI"/>
                 <a:ea typeface="Segoe UI"/>
                 <a:cs typeface="Segoe UI"/>
               </a:rPr>
-              <a:t>bf16</a:t>
-            </a:r>
-          </a:p>
-        </p:txBody>
-      </p:sp>
-      <p:sp>
-        <p:nvSpPr>
-          <p:cNvPr id="17539" name="TextBox 17538"/>
+              <a:t>Herbie</a:t>
+            </a:r>
+          </a:p>
+        </p:txBody>
+      </p:sp>
+      <p:sp>
+        <p:nvSpPr>
+          <p:cNvPr id="17551" name="Rounded Rectangle 17550"/>
+          <p:cNvSpPr/>
+          <p:nvPr/>
+        </p:nvSpPr>
+        <p:spPr>
+          <a:xfrm>
+            <a:off x="10629900" y="4704588"/>
+            <a:ext cx="592073" cy="443484"/>
+          </a:xfrm>
+          <a:prstGeom prst="roundRect">
+            <a:avLst>
+              <a:gd name="adj" fmla="val 18000"/>
+            </a:avLst>
+          </a:prstGeom>
+          <a:solidFill>
+            <a:srgbClr val="FFFFFF"/>
+          </a:solidFill>
+          <a:ln w="9525">
+            <a:solidFill>
+              <a:srgbClr val="D9E2EE"/>
+            </a:solidFill>
+          </a:ln>
+          <a:effectLst/>
+        </p:spPr>
+        <p:style>
+          <a:lnRef idx="1">
+            <a:schemeClr val="accent1"/>
+          </a:lnRef>
+          <a:fillRef idx="3">
+            <a:schemeClr val="accent1"/>
+          </a:fillRef>
+          <a:effectRef idx="2">
+            <a:schemeClr val="accent1"/>
+          </a:effectRef>
+          <a:fontRef idx="minor">
+            <a:schemeClr val="lt1"/>
+          </a:fontRef>
+        </p:style>
+        <p:txBody>
+          <a:bodyPr rtlCol="0" anchor="ctr"/>
+          <a:lstStyle/>
+          <a:p/>
+        </p:txBody>
+      </p:sp>
+      <p:pic>
+        <p:nvPicPr>
+          <p:cNvPr id="17552" name="Picture 17551" descr="pyproj.png"/>
+          <p:cNvPicPr>
+            <a:picLocks noChangeAspect="1"/>
+          </p:cNvPicPr>
+          <p:nvPr/>
+        </p:nvPicPr>
+        <p:blipFill>
+          <a:blip r:embed="rId27"/>
+          <a:stretch>
+            <a:fillRect/>
+          </a:stretch>
+        </p:blipFill>
+        <p:spPr>
+          <a:xfrm>
+            <a:off x="10799229" y="4741164"/>
+            <a:ext cx="253414" cy="260604"/>
+          </a:xfrm>
+          <a:prstGeom prst="rect">
+            <a:avLst/>
+          </a:prstGeom>
+        </p:spPr>
+      </p:pic>
+      <p:sp>
+        <p:nvSpPr>
+          <p:cNvPr id="17553" name="TextBox 17552"/>
           <p:cNvSpPr txBox="1"/>
           <p:nvPr/>
         </p:nvSpPr>
         <p:spPr>
           <a:xfrm>
-            <a:off x="8787384" y="4636007"/>
-            <a:ext cx="3099815" cy="146304"/>
+            <a:off x="10648188" y="5010912"/>
+            <a:ext cx="555497" cy="118872"/>
           </a:xfrm>
           <a:prstGeom prst="rect">
             <a:avLst/>
@@ -16067,38 +16552,38 @@
           <a:noFill/>
         </p:spPr>
         <p:txBody>
-          <a:bodyPr wrap="square" lIns="0" rIns="0" tIns="0" bIns="0" anchor="t"/>
-          <a:lstStyle/>
-          <a:p>
-            <a:pPr algn="l"/>
-            <a:r>
-              <a:rPr sz="700" i="0" b="1">
-                <a:solidFill>
-                  <a:srgbClr val="138808"/>
+          <a:bodyPr wrap="square" lIns="0" rIns="0" tIns="0" bIns="0" anchor="ctr"/>
+          <a:lstStyle/>
+          <a:p>
+            <a:pPr algn="ctr"/>
+            <a:r>
+              <a:rPr sz="600" i="0" b="1">
+                <a:solidFill>
+                  <a:srgbClr val="3D4A5C"/>
                 </a:solidFill>
                 <a:latin typeface="Segoe UI"/>
                 <a:ea typeface="Segoe UI"/>
                 <a:cs typeface="Segoe UI"/>
               </a:rPr>
-              <a:t>DATA</a:t>
-            </a:r>
-          </a:p>
-        </p:txBody>
-      </p:sp>
-      <p:sp>
-        <p:nvSpPr>
-          <p:cNvPr id="17540" name="Rounded Rectangle 17539"/>
+              <a:t>pyproj</a:t>
+            </a:r>
+          </a:p>
+        </p:txBody>
+      </p:sp>
+      <p:sp>
+        <p:nvSpPr>
+          <p:cNvPr id="17554" name="Rounded Rectangle 17553"/>
           <p:cNvSpPr/>
           <p:nvPr/>
         </p:nvSpPr>
         <p:spPr>
           <a:xfrm>
-            <a:off x="8787384" y="4800599"/>
-            <a:ext cx="453542" cy="192024"/>
+            <a:off x="11276838" y="4704588"/>
+            <a:ext cx="592073" cy="443484"/>
           </a:xfrm>
           <a:prstGeom prst="roundRect">
             <a:avLst>
-              <a:gd name="adj" fmla="val 50000"/>
+              <a:gd name="adj" fmla="val 18000"/>
             </a:avLst>
           </a:prstGeom>
           <a:solidFill>
@@ -16131,14 +16616,14 @@
       </p:sp>
       <p:sp>
         <p:nvSpPr>
-          <p:cNvPr id="17541" name="TextBox 17540"/>
+          <p:cNvPr id="17555" name="TextBox 17554"/>
           <p:cNvSpPr txBox="1"/>
           <p:nvPr/>
         </p:nvSpPr>
         <p:spPr>
           <a:xfrm>
-            <a:off x="8787384" y="4800599"/>
-            <a:ext cx="453542" cy="192024"/>
+            <a:off x="11304269" y="4704588"/>
+            <a:ext cx="537209" cy="443484"/>
           </a:xfrm>
           <a:prstGeom prst="rect">
             <a:avLst/>
@@ -16149,9 +16634,13 @@
           <a:bodyPr wrap="square" lIns="0" rIns="0" tIns="0" bIns="0" anchor="ctr"/>
           <a:lstStyle/>
           <a:p>
-            <a:pPr algn="ctr"/>
-            <a:r>
-              <a:rPr sz="720" i="0" b="1">
+            <a:pPr algn="ctr">
+              <a:lnSpc>
+                <a:spcPct val="90000"/>
+              </a:lnSpc>
+            </a:pPr>
+            <a:r>
+              <a:rPr sz="680" i="0" b="1">
                 <a:solidFill>
                   <a:srgbClr val="1B2533"/>
                 </a:solidFill>
@@ -16159,29 +16648,29 @@
                 <a:ea typeface="Segoe UI"/>
                 <a:cs typeface="Segoe UI"/>
               </a:rPr>
-              <a:t>xarray</a:t>
-            </a:r>
-          </a:p>
-        </p:txBody>
-      </p:sp>
-      <p:sp>
-        <p:nvSpPr>
-          <p:cNvPr id="17542" name="Rounded Rectangle 17541"/>
+              <a:t>h5py · s3fs · cfgrib</a:t>
+            </a:r>
+          </a:p>
+        </p:txBody>
+      </p:sp>
+      <p:sp>
+        <p:nvSpPr>
+          <p:cNvPr id="17556" name="Rounded Rectangle 17555"/>
           <p:cNvSpPr/>
           <p:nvPr/>
         </p:nvSpPr>
         <p:spPr>
           <a:xfrm>
-            <a:off x="9295790" y="4800599"/>
-            <a:ext cx="351129" cy="192024"/>
+            <a:off x="8769096" y="5202936"/>
+            <a:ext cx="512064" cy="443484"/>
           </a:xfrm>
           <a:prstGeom prst="roundRect">
             <a:avLst>
-              <a:gd name="adj" fmla="val 50000"/>
+              <a:gd name="adj" fmla="val 18000"/>
             </a:avLst>
           </a:prstGeom>
           <a:solidFill>
-            <a:srgbClr val="E4F3E6"/>
+            <a:srgbClr val="5B3FA8"/>
           </a:solidFill>
           <a:ln>
             <a:noFill/>
@@ -16210,14 +16699,14 @@
       </p:sp>
       <p:sp>
         <p:nvSpPr>
-          <p:cNvPr id="17543" name="TextBox 17542"/>
+          <p:cNvPr id="17557" name="TextBox 17556"/>
           <p:cNvSpPr txBox="1"/>
           <p:nvPr/>
         </p:nvSpPr>
         <p:spPr>
           <a:xfrm>
-            <a:off x="9295790" y="4800599"/>
-            <a:ext cx="351129" cy="192024"/>
+            <a:off x="8769096" y="5202936"/>
+            <a:ext cx="512064" cy="443484"/>
           </a:xfrm>
           <a:prstGeom prst="rect">
             <a:avLst/>
@@ -16230,37 +16719,457 @@
           <a:p>
             <a:pPr algn="ctr"/>
             <a:r>
-              <a:rPr sz="720" i="0" b="1">
-                <a:solidFill>
-                  <a:srgbClr val="1B2533"/>
+              <a:rPr sz="750" i="0" b="1">
+                <a:solidFill>
+                  <a:srgbClr val="FFFFFF"/>
                 </a:solidFill>
                 <a:latin typeface="Segoe UI"/>
                 <a:ea typeface="Segoe UI"/>
                 <a:cs typeface="Segoe UI"/>
               </a:rPr>
-              <a:t>h5py</a:t>
-            </a:r>
-          </a:p>
-        </p:txBody>
-      </p:sp>
-      <p:sp>
-        <p:nvSpPr>
-          <p:cNvPr id="17544" name="Rounded Rectangle 17543"/>
+              <a:t>Web</a:t>
+            </a:r>
+          </a:p>
+        </p:txBody>
+      </p:sp>
+      <p:sp>
+        <p:nvSpPr>
+          <p:cNvPr id="17558" name="Rounded Rectangle 17557"/>
           <p:cNvSpPr/>
           <p:nvPr/>
         </p:nvSpPr>
         <p:spPr>
           <a:xfrm>
-            <a:off x="9701784" y="4800599"/>
-            <a:ext cx="351129" cy="192024"/>
+            <a:off x="9336024" y="5202936"/>
+            <a:ext cx="592073" cy="443484"/>
           </a:xfrm>
           <a:prstGeom prst="roundRect">
             <a:avLst>
-              <a:gd name="adj" fmla="val 50000"/>
+              <a:gd name="adj" fmla="val 18000"/>
             </a:avLst>
           </a:prstGeom>
           <a:solidFill>
-            <a:srgbClr val="E4F3E6"/>
+            <a:srgbClr val="FFFFFF"/>
+          </a:solidFill>
+          <a:ln w="9525">
+            <a:solidFill>
+              <a:srgbClr val="D9E2EE"/>
+            </a:solidFill>
+          </a:ln>
+          <a:effectLst/>
+        </p:spPr>
+        <p:style>
+          <a:lnRef idx="1">
+            <a:schemeClr val="accent1"/>
+          </a:lnRef>
+          <a:fillRef idx="3">
+            <a:schemeClr val="accent1"/>
+          </a:fillRef>
+          <a:effectRef idx="2">
+            <a:schemeClr val="accent1"/>
+          </a:effectRef>
+          <a:fontRef idx="minor">
+            <a:schemeClr val="lt1"/>
+          </a:fontRef>
+        </p:style>
+        <p:txBody>
+          <a:bodyPr rtlCol="0" anchor="ctr"/>
+          <a:lstStyle/>
+          <a:p/>
+        </p:txBody>
+      </p:sp>
+      <p:pic>
+        <p:nvPicPr>
+          <p:cNvPr id="17559" name="Picture 17558" descr="react.png"/>
+          <p:cNvPicPr>
+            <a:picLocks noChangeAspect="1"/>
+          </p:cNvPicPr>
+          <p:nvPr/>
+        </p:nvPicPr>
+        <p:blipFill>
+          <a:blip r:embed="rId28"/>
+          <a:stretch>
+            <a:fillRect/>
+          </a:stretch>
+        </p:blipFill>
+        <p:spPr>
+          <a:xfrm>
+            <a:off x="9485844" y="5239512"/>
+            <a:ext cx="292433" cy="260604"/>
+          </a:xfrm>
+          <a:prstGeom prst="rect">
+            <a:avLst/>
+          </a:prstGeom>
+        </p:spPr>
+      </p:pic>
+      <p:sp>
+        <p:nvSpPr>
+          <p:cNvPr id="17560" name="TextBox 17559"/>
+          <p:cNvSpPr txBox="1"/>
+          <p:nvPr/>
+        </p:nvSpPr>
+        <p:spPr>
+          <a:xfrm>
+            <a:off x="9354312" y="5509259"/>
+            <a:ext cx="555497" cy="118872"/>
+          </a:xfrm>
+          <a:prstGeom prst="rect">
+            <a:avLst/>
+          </a:prstGeom>
+          <a:noFill/>
+        </p:spPr>
+        <p:txBody>
+          <a:bodyPr wrap="square" lIns="0" rIns="0" tIns="0" bIns="0" anchor="ctr"/>
+          <a:lstStyle/>
+          <a:p>
+            <a:pPr algn="ctr"/>
+            <a:r>
+              <a:rPr sz="600" i="0" b="1">
+                <a:solidFill>
+                  <a:srgbClr val="3D4A5C"/>
+                </a:solidFill>
+                <a:latin typeface="Segoe UI"/>
+                <a:ea typeface="Segoe UI"/>
+                <a:cs typeface="Segoe UI"/>
+              </a:rPr>
+              <a:t>React</a:t>
+            </a:r>
+          </a:p>
+        </p:txBody>
+      </p:sp>
+      <p:sp>
+        <p:nvSpPr>
+          <p:cNvPr id="17561" name="Rounded Rectangle 17560"/>
+          <p:cNvSpPr/>
+          <p:nvPr/>
+        </p:nvSpPr>
+        <p:spPr>
+          <a:xfrm>
+            <a:off x="9982962" y="5202936"/>
+            <a:ext cx="592073" cy="443484"/>
+          </a:xfrm>
+          <a:prstGeom prst="roundRect">
+            <a:avLst>
+              <a:gd name="adj" fmla="val 18000"/>
+            </a:avLst>
+          </a:prstGeom>
+          <a:solidFill>
+            <a:srgbClr val="FFFFFF"/>
+          </a:solidFill>
+          <a:ln w="9525">
+            <a:solidFill>
+              <a:srgbClr val="D9E2EE"/>
+            </a:solidFill>
+          </a:ln>
+          <a:effectLst/>
+        </p:spPr>
+        <p:style>
+          <a:lnRef idx="1">
+            <a:schemeClr val="accent1"/>
+          </a:lnRef>
+          <a:fillRef idx="3">
+            <a:schemeClr val="accent1"/>
+          </a:fillRef>
+          <a:effectRef idx="2">
+            <a:schemeClr val="accent1"/>
+          </a:effectRef>
+          <a:fontRef idx="minor">
+            <a:schemeClr val="lt1"/>
+          </a:fontRef>
+        </p:style>
+        <p:txBody>
+          <a:bodyPr rtlCol="0" anchor="ctr"/>
+          <a:lstStyle/>
+          <a:p/>
+        </p:txBody>
+      </p:sp>
+      <p:pic>
+        <p:nvPicPr>
+          <p:cNvPr id="17562" name="Picture 17561" descr="typescript.png"/>
+          <p:cNvPicPr>
+            <a:picLocks noChangeAspect="1"/>
+          </p:cNvPicPr>
+          <p:nvPr/>
+        </p:nvPicPr>
+        <p:blipFill>
+          <a:blip r:embed="rId29"/>
+          <a:stretch>
+            <a:fillRect/>
+          </a:stretch>
+        </p:blipFill>
+        <p:spPr>
+          <a:xfrm>
+            <a:off x="10148697" y="5239512"/>
+            <a:ext cx="260604" cy="260604"/>
+          </a:xfrm>
+          <a:prstGeom prst="rect">
+            <a:avLst/>
+          </a:prstGeom>
+        </p:spPr>
+      </p:pic>
+      <p:sp>
+        <p:nvSpPr>
+          <p:cNvPr id="17563" name="TextBox 17562"/>
+          <p:cNvSpPr txBox="1"/>
+          <p:nvPr/>
+        </p:nvSpPr>
+        <p:spPr>
+          <a:xfrm>
+            <a:off x="10001250" y="5509259"/>
+            <a:ext cx="555497" cy="118872"/>
+          </a:xfrm>
+          <a:prstGeom prst="rect">
+            <a:avLst/>
+          </a:prstGeom>
+          <a:noFill/>
+        </p:spPr>
+        <p:txBody>
+          <a:bodyPr wrap="square" lIns="0" rIns="0" tIns="0" bIns="0" anchor="ctr"/>
+          <a:lstStyle/>
+          <a:p>
+            <a:pPr algn="ctr"/>
+            <a:r>
+              <a:rPr sz="600" i="0" b="1">
+                <a:solidFill>
+                  <a:srgbClr val="3D4A5C"/>
+                </a:solidFill>
+                <a:latin typeface="Segoe UI"/>
+                <a:ea typeface="Segoe UI"/>
+                <a:cs typeface="Segoe UI"/>
+              </a:rPr>
+              <a:t>TypeScript</a:t>
+            </a:r>
+          </a:p>
+        </p:txBody>
+      </p:sp>
+      <p:sp>
+        <p:nvSpPr>
+          <p:cNvPr id="17564" name="Rounded Rectangle 17563"/>
+          <p:cNvSpPr/>
+          <p:nvPr/>
+        </p:nvSpPr>
+        <p:spPr>
+          <a:xfrm>
+            <a:off x="10629900" y="5202936"/>
+            <a:ext cx="592073" cy="443484"/>
+          </a:xfrm>
+          <a:prstGeom prst="roundRect">
+            <a:avLst>
+              <a:gd name="adj" fmla="val 18000"/>
+            </a:avLst>
+          </a:prstGeom>
+          <a:solidFill>
+            <a:srgbClr val="FFFFFF"/>
+          </a:solidFill>
+          <a:ln w="9525">
+            <a:solidFill>
+              <a:srgbClr val="D9E2EE"/>
+            </a:solidFill>
+          </a:ln>
+          <a:effectLst/>
+        </p:spPr>
+        <p:style>
+          <a:lnRef idx="1">
+            <a:schemeClr val="accent1"/>
+          </a:lnRef>
+          <a:fillRef idx="3">
+            <a:schemeClr val="accent1"/>
+          </a:fillRef>
+          <a:effectRef idx="2">
+            <a:schemeClr val="accent1"/>
+          </a:effectRef>
+          <a:fontRef idx="minor">
+            <a:schemeClr val="lt1"/>
+          </a:fontRef>
+        </p:style>
+        <p:txBody>
+          <a:bodyPr rtlCol="0" anchor="ctr"/>
+          <a:lstStyle/>
+          <a:p/>
+        </p:txBody>
+      </p:sp>
+      <p:pic>
+        <p:nvPicPr>
+          <p:cNvPr id="17565" name="Picture 17564" descr="vite.png"/>
+          <p:cNvPicPr>
+            <a:picLocks noChangeAspect="1"/>
+          </p:cNvPicPr>
+          <p:nvPr/>
+        </p:nvPicPr>
+        <p:blipFill>
+          <a:blip r:embed="rId30"/>
+          <a:stretch>
+            <a:fillRect/>
+          </a:stretch>
+        </p:blipFill>
+        <p:spPr>
+          <a:xfrm>
+            <a:off x="10795635" y="5239512"/>
+            <a:ext cx="260604" cy="260604"/>
+          </a:xfrm>
+          <a:prstGeom prst="rect">
+            <a:avLst/>
+          </a:prstGeom>
+        </p:spPr>
+      </p:pic>
+      <p:sp>
+        <p:nvSpPr>
+          <p:cNvPr id="17566" name="TextBox 17565"/>
+          <p:cNvSpPr txBox="1"/>
+          <p:nvPr/>
+        </p:nvSpPr>
+        <p:spPr>
+          <a:xfrm>
+            <a:off x="10648188" y="5509259"/>
+            <a:ext cx="555497" cy="118872"/>
+          </a:xfrm>
+          <a:prstGeom prst="rect">
+            <a:avLst/>
+          </a:prstGeom>
+          <a:noFill/>
+        </p:spPr>
+        <p:txBody>
+          <a:bodyPr wrap="square" lIns="0" rIns="0" tIns="0" bIns="0" anchor="ctr"/>
+          <a:lstStyle/>
+          <a:p>
+            <a:pPr algn="ctr"/>
+            <a:r>
+              <a:rPr sz="600" i="0" b="1">
+                <a:solidFill>
+                  <a:srgbClr val="3D4A5C"/>
+                </a:solidFill>
+                <a:latin typeface="Segoe UI"/>
+                <a:ea typeface="Segoe UI"/>
+                <a:cs typeface="Segoe UI"/>
+              </a:rPr>
+              <a:t>Vite</a:t>
+            </a:r>
+          </a:p>
+        </p:txBody>
+      </p:sp>
+      <p:sp>
+        <p:nvSpPr>
+          <p:cNvPr id="17567" name="Rounded Rectangle 17566"/>
+          <p:cNvSpPr/>
+          <p:nvPr/>
+        </p:nvSpPr>
+        <p:spPr>
+          <a:xfrm>
+            <a:off x="11276838" y="5202936"/>
+            <a:ext cx="592073" cy="443484"/>
+          </a:xfrm>
+          <a:prstGeom prst="roundRect">
+            <a:avLst>
+              <a:gd name="adj" fmla="val 18000"/>
+            </a:avLst>
+          </a:prstGeom>
+          <a:solidFill>
+            <a:srgbClr val="FFFFFF"/>
+          </a:solidFill>
+          <a:ln w="9525">
+            <a:solidFill>
+              <a:srgbClr val="D9E2EE"/>
+            </a:solidFill>
+          </a:ln>
+          <a:effectLst/>
+        </p:spPr>
+        <p:style>
+          <a:lnRef idx="1">
+            <a:schemeClr val="accent1"/>
+          </a:lnRef>
+          <a:fillRef idx="3">
+            <a:schemeClr val="accent1"/>
+          </a:fillRef>
+          <a:effectRef idx="2">
+            <a:schemeClr val="accent1"/>
+          </a:effectRef>
+          <a:fontRef idx="minor">
+            <a:schemeClr val="lt1"/>
+          </a:fontRef>
+        </p:style>
+        <p:txBody>
+          <a:bodyPr rtlCol="0" anchor="ctr"/>
+          <a:lstStyle/>
+          <a:p/>
+        </p:txBody>
+      </p:sp>
+      <p:pic>
+        <p:nvPicPr>
+          <p:cNvPr id="17568" name="Picture 17567" descr="maplibre.png"/>
+          <p:cNvPicPr>
+            <a:picLocks noChangeAspect="1"/>
+          </p:cNvPicPr>
+          <p:nvPr/>
+        </p:nvPicPr>
+        <p:blipFill>
+          <a:blip r:embed="rId31"/>
+          <a:stretch>
+            <a:fillRect/>
+          </a:stretch>
+        </p:blipFill>
+        <p:spPr>
+          <a:xfrm>
+            <a:off x="11442573" y="5239512"/>
+            <a:ext cx="260604" cy="260604"/>
+          </a:xfrm>
+          <a:prstGeom prst="rect">
+            <a:avLst/>
+          </a:prstGeom>
+        </p:spPr>
+      </p:pic>
+      <p:sp>
+        <p:nvSpPr>
+          <p:cNvPr id="17569" name="TextBox 17568"/>
+          <p:cNvSpPr txBox="1"/>
+          <p:nvPr/>
+        </p:nvSpPr>
+        <p:spPr>
+          <a:xfrm>
+            <a:off x="11295126" y="5509259"/>
+            <a:ext cx="555497" cy="118872"/>
+          </a:xfrm>
+          <a:prstGeom prst="rect">
+            <a:avLst/>
+          </a:prstGeom>
+          <a:noFill/>
+        </p:spPr>
+        <p:txBody>
+          <a:bodyPr wrap="square" lIns="0" rIns="0" tIns="0" bIns="0" anchor="ctr"/>
+          <a:lstStyle/>
+          <a:p>
+            <a:pPr algn="ctr"/>
+            <a:r>
+              <a:rPr sz="600" i="0" b="1">
+                <a:solidFill>
+                  <a:srgbClr val="3D4A5C"/>
+                </a:solidFill>
+                <a:latin typeface="Segoe UI"/>
+                <a:ea typeface="Segoe UI"/>
+                <a:cs typeface="Segoe UI"/>
+              </a:rPr>
+              <a:t>MapLibre GL</a:t>
+            </a:r>
+          </a:p>
+        </p:txBody>
+      </p:sp>
+      <p:sp>
+        <p:nvSpPr>
+          <p:cNvPr id="17570" name="Rounded Rectangle 17569"/>
+          <p:cNvSpPr/>
+          <p:nvPr/>
+        </p:nvSpPr>
+        <p:spPr>
+          <a:xfrm>
+            <a:off x="8769096" y="5701284"/>
+            <a:ext cx="512064" cy="443484"/>
+          </a:xfrm>
+          <a:prstGeom prst="roundRect">
+            <a:avLst>
+              <a:gd name="adj" fmla="val 18000"/>
+            </a:avLst>
+          </a:prstGeom>
+          <a:solidFill>
+            <a:srgbClr val="F37021"/>
           </a:solidFill>
           <a:ln>
             <a:noFill/>
@@ -16289,14 +17198,14 @@
       </p:sp>
       <p:sp>
         <p:nvSpPr>
-          <p:cNvPr id="17545" name="TextBox 17544"/>
+          <p:cNvPr id="17571" name="TextBox 17570"/>
           <p:cNvSpPr txBox="1"/>
           <p:nvPr/>
         </p:nvSpPr>
         <p:spPr>
           <a:xfrm>
-            <a:off x="9701784" y="4800599"/>
-            <a:ext cx="351129" cy="192024"/>
+            <a:off x="8769096" y="5701284"/>
+            <a:ext cx="512064" cy="443484"/>
           </a:xfrm>
           <a:prstGeom prst="rect">
             <a:avLst/>
@@ -16309,40 +17218,42 @@
           <a:p>
             <a:pPr algn="ctr"/>
             <a:r>
-              <a:rPr sz="720" i="0" b="1">
-                <a:solidFill>
-                  <a:srgbClr val="1B2533"/>
+              <a:rPr sz="750" i="0" b="1">
+                <a:solidFill>
+                  <a:srgbClr val="FFFFFF"/>
                 </a:solidFill>
                 <a:latin typeface="Segoe UI"/>
                 <a:ea typeface="Segoe UI"/>
                 <a:cs typeface="Segoe UI"/>
               </a:rPr>
-              <a:t>s3fs</a:t>
-            </a:r>
-          </a:p>
-        </p:txBody>
-      </p:sp>
-      <p:sp>
-        <p:nvSpPr>
-          <p:cNvPr id="17546" name="Rounded Rectangle 17545"/>
+              <a:t>Infra</a:t>
+            </a:r>
+          </a:p>
+        </p:txBody>
+      </p:sp>
+      <p:sp>
+        <p:nvSpPr>
+          <p:cNvPr id="17572" name="Rounded Rectangle 17571"/>
           <p:cNvSpPr/>
           <p:nvPr/>
         </p:nvSpPr>
         <p:spPr>
           <a:xfrm>
-            <a:off x="10107777" y="4800599"/>
-            <a:ext cx="453542" cy="192024"/>
+            <a:off x="9336024" y="5701284"/>
+            <a:ext cx="592073" cy="443484"/>
           </a:xfrm>
           <a:prstGeom prst="roundRect">
             <a:avLst>
-              <a:gd name="adj" fmla="val 50000"/>
+              <a:gd name="adj" fmla="val 18000"/>
             </a:avLst>
           </a:prstGeom>
           <a:solidFill>
-            <a:srgbClr val="E4F3E6"/>
+            <a:srgbClr val="FFFFFF"/>
           </a:solidFill>
-          <a:ln>
-            <a:noFill/>
+          <a:ln w="9525">
+            <a:solidFill>
+              <a:srgbClr val="D9E2EE"/>
+            </a:solidFill>
           </a:ln>
           <a:effectLst/>
         </p:spPr>
@@ -16366,16 +17277,40 @@
           <a:p/>
         </p:txBody>
       </p:sp>
-      <p:sp>
-        <p:nvSpPr>
-          <p:cNvPr id="17547" name="TextBox 17546"/>
+      <p:pic>
+        <p:nvPicPr>
+          <p:cNvPr id="17573" name="Picture 17572" descr="aws.png"/>
+          <p:cNvPicPr>
+            <a:picLocks noChangeAspect="1"/>
+          </p:cNvPicPr>
+          <p:nvPr/>
+        </p:nvPicPr>
+        <p:blipFill>
+          <a:blip r:embed="rId32"/>
+          <a:stretch>
+            <a:fillRect/>
+          </a:stretch>
+        </p:blipFill>
+        <p:spPr>
+          <a:xfrm>
+            <a:off x="9413914" y="5737860"/>
+            <a:ext cx="436292" cy="260604"/>
+          </a:xfrm>
+          <a:prstGeom prst="rect">
+            <a:avLst/>
+          </a:prstGeom>
+        </p:spPr>
+      </p:pic>
+      <p:sp>
+        <p:nvSpPr>
+          <p:cNvPr id="17574" name="TextBox 17573"/>
           <p:cNvSpPr txBox="1"/>
           <p:nvPr/>
         </p:nvSpPr>
         <p:spPr>
           <a:xfrm>
-            <a:off x="10107777" y="4800599"/>
-            <a:ext cx="453542" cy="192024"/>
+            <a:off x="9354312" y="6007608"/>
+            <a:ext cx="555497" cy="118872"/>
           </a:xfrm>
           <a:prstGeom prst="rect">
             <a:avLst/>
@@ -16388,40 +17323,42 @@
           <a:p>
             <a:pPr algn="ctr"/>
             <a:r>
-              <a:rPr sz="720" i="0" b="1">
-                <a:solidFill>
-                  <a:srgbClr val="1B2533"/>
+              <a:rPr sz="600" i="0" b="1">
+                <a:solidFill>
+                  <a:srgbClr val="3D4A5C"/>
                 </a:solidFill>
                 <a:latin typeface="Segoe UI"/>
                 <a:ea typeface="Segoe UI"/>
                 <a:cs typeface="Segoe UI"/>
               </a:rPr>
-              <a:t>Herbie</a:t>
-            </a:r>
-          </a:p>
-        </p:txBody>
-      </p:sp>
-      <p:sp>
-        <p:nvSpPr>
-          <p:cNvPr id="17548" name="Rounded Rectangle 17547"/>
+              <a:t>Open Data</a:t>
+            </a:r>
+          </a:p>
+        </p:txBody>
+      </p:sp>
+      <p:sp>
+        <p:nvSpPr>
+          <p:cNvPr id="17575" name="Rounded Rectangle 17574"/>
           <p:cNvSpPr/>
           <p:nvPr/>
         </p:nvSpPr>
         <p:spPr>
           <a:xfrm>
-            <a:off x="10616184" y="4800599"/>
-            <a:ext cx="453542" cy="192024"/>
+            <a:off x="9982962" y="5701284"/>
+            <a:ext cx="592073" cy="443484"/>
           </a:xfrm>
           <a:prstGeom prst="roundRect">
             <a:avLst>
-              <a:gd name="adj" fmla="val 50000"/>
+              <a:gd name="adj" fmla="val 18000"/>
             </a:avLst>
           </a:prstGeom>
           <a:solidFill>
-            <a:srgbClr val="E4F3E6"/>
+            <a:srgbClr val="FFFFFF"/>
           </a:solidFill>
-          <a:ln>
-            <a:noFill/>
+          <a:ln w="9525">
+            <a:solidFill>
+              <a:srgbClr val="D9E2EE"/>
+            </a:solidFill>
           </a:ln>
           <a:effectLst/>
         </p:spPr>
@@ -16445,16 +17382,40 @@
           <a:p/>
         </p:txBody>
       </p:sp>
-      <p:sp>
-        <p:nvSpPr>
-          <p:cNvPr id="17549" name="TextBox 17548"/>
+      <p:pic>
+        <p:nvPicPr>
+          <p:cNvPr id="17576" name="Picture 17575" descr="cloudflare.png"/>
+          <p:cNvPicPr>
+            <a:picLocks noChangeAspect="1"/>
+          </p:cNvPicPr>
+          <p:nvPr/>
+        </p:nvPicPr>
+        <p:blipFill>
+          <a:blip r:embed="rId33"/>
+          <a:stretch>
+            <a:fillRect/>
+          </a:stretch>
+        </p:blipFill>
+        <p:spPr>
+          <a:xfrm>
+            <a:off x="10046970" y="5763272"/>
+            <a:ext cx="464057" cy="209779"/>
+          </a:xfrm>
+          <a:prstGeom prst="rect">
+            <a:avLst/>
+          </a:prstGeom>
+        </p:spPr>
+      </p:pic>
+      <p:sp>
+        <p:nvSpPr>
+          <p:cNvPr id="17577" name="TextBox 17576"/>
           <p:cNvSpPr txBox="1"/>
           <p:nvPr/>
         </p:nvSpPr>
         <p:spPr>
           <a:xfrm>
-            <a:off x="10616184" y="4800599"/>
-            <a:ext cx="453542" cy="192024"/>
+            <a:off x="10001250" y="6007608"/>
+            <a:ext cx="555497" cy="118872"/>
           </a:xfrm>
           <a:prstGeom prst="rect">
             <a:avLst/>
@@ -16467,40 +17428,42 @@
           <a:p>
             <a:pPr algn="ctr"/>
             <a:r>
-              <a:rPr sz="720" i="0" b="1">
-                <a:solidFill>
-                  <a:srgbClr val="1B2533"/>
+              <a:rPr sz="600" i="0" b="1">
+                <a:solidFill>
+                  <a:srgbClr val="3D4A5C"/>
                 </a:solidFill>
                 <a:latin typeface="Segoe UI"/>
                 <a:ea typeface="Segoe UI"/>
                 <a:cs typeface="Segoe UI"/>
               </a:rPr>
-              <a:t>pyproj</a:t>
-            </a:r>
-          </a:p>
-        </p:txBody>
-      </p:sp>
-      <p:sp>
-        <p:nvSpPr>
-          <p:cNvPr id="17550" name="Rounded Rectangle 17549"/>
+              <a:t>Pages</a:t>
+            </a:r>
+          </a:p>
+        </p:txBody>
+      </p:sp>
+      <p:sp>
+        <p:nvSpPr>
+          <p:cNvPr id="17578" name="Rounded Rectangle 17577"/>
           <p:cNvSpPr/>
           <p:nvPr/>
         </p:nvSpPr>
         <p:spPr>
           <a:xfrm>
-            <a:off x="11124590" y="4800599"/>
-            <a:ext cx="453542" cy="192024"/>
+            <a:off x="10629900" y="5701284"/>
+            <a:ext cx="592073" cy="443484"/>
           </a:xfrm>
           <a:prstGeom prst="roundRect">
             <a:avLst>
-              <a:gd name="adj" fmla="val 50000"/>
+              <a:gd name="adj" fmla="val 18000"/>
             </a:avLst>
           </a:prstGeom>
           <a:solidFill>
-            <a:srgbClr val="E4F3E6"/>
+            <a:srgbClr val="FFFFFF"/>
           </a:solidFill>
-          <a:ln>
-            <a:noFill/>
+          <a:ln w="9525">
+            <a:solidFill>
+              <a:srgbClr val="D9E2EE"/>
+            </a:solidFill>
           </a:ln>
           <a:effectLst/>
         </p:spPr>
@@ -16524,16 +17487,40 @@
           <a:p/>
         </p:txBody>
       </p:sp>
-      <p:sp>
-        <p:nvSpPr>
-          <p:cNvPr id="17551" name="TextBox 17550"/>
+      <p:pic>
+        <p:nvPicPr>
+          <p:cNvPr id="17579" name="Picture 17578" descr="nvidia.png"/>
+          <p:cNvPicPr>
+            <a:picLocks noChangeAspect="1"/>
+          </p:cNvPicPr>
+          <p:nvPr/>
+        </p:nvPicPr>
+        <p:blipFill>
+          <a:blip r:embed="rId34"/>
+          <a:stretch>
+            <a:fillRect/>
+          </a:stretch>
+        </p:blipFill>
+        <p:spPr>
+          <a:xfrm>
+            <a:off x="10730484" y="5737860"/>
+            <a:ext cx="390906" cy="260604"/>
+          </a:xfrm>
+          <a:prstGeom prst="rect">
+            <a:avLst/>
+          </a:prstGeom>
+        </p:spPr>
+      </p:pic>
+      <p:sp>
+        <p:nvSpPr>
+          <p:cNvPr id="17580" name="TextBox 17579"/>
           <p:cNvSpPr txBox="1"/>
           <p:nvPr/>
         </p:nvSpPr>
         <p:spPr>
           <a:xfrm>
-            <a:off x="11124590" y="4800599"/>
-            <a:ext cx="453542" cy="192024"/>
+            <a:off x="10648188" y="6007608"/>
+            <a:ext cx="555497" cy="118872"/>
           </a:xfrm>
           <a:prstGeom prst="rect">
             <a:avLst/>
@@ -16546,419 +17533,33 @@
           <a:p>
             <a:pPr algn="ctr"/>
             <a:r>
-              <a:rPr sz="720" i="0" b="1">
-                <a:solidFill>
-                  <a:srgbClr val="1B2533"/>
+              <a:rPr sz="600" i="0" b="1">
+                <a:solidFill>
+                  <a:srgbClr val="3D4A5C"/>
                 </a:solidFill>
                 <a:latin typeface="Segoe UI"/>
                 <a:ea typeface="Segoe UI"/>
                 <a:cs typeface="Segoe UI"/>
               </a:rPr>
-              <a:t>cfgrib</a:t>
-            </a:r>
-          </a:p>
-        </p:txBody>
-      </p:sp>
-      <p:sp>
-        <p:nvSpPr>
-          <p:cNvPr id="17552" name="TextBox 17551"/>
-          <p:cNvSpPr txBox="1"/>
-          <p:nvPr/>
-        </p:nvSpPr>
-        <p:spPr>
-          <a:xfrm>
-            <a:off x="8787384" y="5065775"/>
-            <a:ext cx="3099815" cy="146304"/>
-          </a:xfrm>
-          <a:prstGeom prst="rect">
-            <a:avLst/>
-          </a:prstGeom>
-          <a:noFill/>
-        </p:spPr>
-        <p:txBody>
-          <a:bodyPr wrap="square" lIns="0" rIns="0" tIns="0" bIns="0" anchor="t"/>
-          <a:lstStyle/>
-          <a:p>
-            <a:pPr algn="l"/>
-            <a:r>
-              <a:rPr sz="700" i="0" b="1">
-                <a:solidFill>
-                  <a:srgbClr val="5B3FA8"/>
-                </a:solidFill>
-                <a:latin typeface="Segoe UI"/>
-                <a:ea typeface="Segoe UI"/>
-                <a:cs typeface="Segoe UI"/>
-              </a:rPr>
-              <a:t>WEB</a:t>
-            </a:r>
-          </a:p>
-        </p:txBody>
-      </p:sp>
-      <p:sp>
-        <p:nvSpPr>
-          <p:cNvPr id="17553" name="Rounded Rectangle 17552"/>
+              <a:t>RTX 5060 Ti</a:t>
+            </a:r>
+          </a:p>
+        </p:txBody>
+      </p:sp>
+      <p:sp>
+        <p:nvSpPr>
+          <p:cNvPr id="17581" name="Rounded Rectangle 17580"/>
           <p:cNvSpPr/>
           <p:nvPr/>
         </p:nvSpPr>
         <p:spPr>
           <a:xfrm>
-            <a:off x="8787384" y="5230367"/>
-            <a:ext cx="402336" cy="192024"/>
+            <a:off x="11276838" y="5701284"/>
+            <a:ext cx="592073" cy="443484"/>
           </a:xfrm>
           <a:prstGeom prst="roundRect">
             <a:avLst>
-              <a:gd name="adj" fmla="val 50000"/>
-            </a:avLst>
-          </a:prstGeom>
-          <a:solidFill>
-            <a:srgbClr val="ECE6F7"/>
-          </a:solidFill>
-          <a:ln>
-            <a:noFill/>
-          </a:ln>
-          <a:effectLst/>
-        </p:spPr>
-        <p:style>
-          <a:lnRef idx="1">
-            <a:schemeClr val="accent1"/>
-          </a:lnRef>
-          <a:fillRef idx="3">
-            <a:schemeClr val="accent1"/>
-          </a:fillRef>
-          <a:effectRef idx="2">
-            <a:schemeClr val="accent1"/>
-          </a:effectRef>
-          <a:fontRef idx="minor">
-            <a:schemeClr val="lt1"/>
-          </a:fontRef>
-        </p:style>
-        <p:txBody>
-          <a:bodyPr rtlCol="0" anchor="ctr"/>
-          <a:lstStyle/>
-          <a:p/>
-        </p:txBody>
-      </p:sp>
-      <p:sp>
-        <p:nvSpPr>
-          <p:cNvPr id="17554" name="TextBox 17553"/>
-          <p:cNvSpPr txBox="1"/>
-          <p:nvPr/>
-        </p:nvSpPr>
-        <p:spPr>
-          <a:xfrm>
-            <a:off x="8787384" y="5230367"/>
-            <a:ext cx="402336" cy="192024"/>
-          </a:xfrm>
-          <a:prstGeom prst="rect">
-            <a:avLst/>
-          </a:prstGeom>
-          <a:noFill/>
-        </p:spPr>
-        <p:txBody>
-          <a:bodyPr wrap="square" lIns="0" rIns="0" tIns="0" bIns="0" anchor="ctr"/>
-          <a:lstStyle/>
-          <a:p>
-            <a:pPr algn="ctr"/>
-            <a:r>
-              <a:rPr sz="720" i="0" b="1">
-                <a:solidFill>
-                  <a:srgbClr val="1B2533"/>
-                </a:solidFill>
-                <a:latin typeface="Segoe UI"/>
-                <a:ea typeface="Segoe UI"/>
-                <a:cs typeface="Segoe UI"/>
-              </a:rPr>
-              <a:t>React</a:t>
-            </a:r>
-          </a:p>
-        </p:txBody>
-      </p:sp>
-      <p:sp>
-        <p:nvSpPr>
-          <p:cNvPr id="17555" name="Rounded Rectangle 17554"/>
-          <p:cNvSpPr/>
-          <p:nvPr/>
-        </p:nvSpPr>
-        <p:spPr>
-          <a:xfrm>
-            <a:off x="9244584" y="5230367"/>
-            <a:ext cx="658368" cy="192024"/>
-          </a:xfrm>
-          <a:prstGeom prst="roundRect">
-            <a:avLst>
-              <a:gd name="adj" fmla="val 50000"/>
-            </a:avLst>
-          </a:prstGeom>
-          <a:solidFill>
-            <a:srgbClr val="ECE6F7"/>
-          </a:solidFill>
-          <a:ln>
-            <a:noFill/>
-          </a:ln>
-          <a:effectLst/>
-        </p:spPr>
-        <p:style>
-          <a:lnRef idx="1">
-            <a:schemeClr val="accent1"/>
-          </a:lnRef>
-          <a:fillRef idx="3">
-            <a:schemeClr val="accent1"/>
-          </a:fillRef>
-          <a:effectRef idx="2">
-            <a:schemeClr val="accent1"/>
-          </a:effectRef>
-          <a:fontRef idx="minor">
-            <a:schemeClr val="lt1"/>
-          </a:fontRef>
-        </p:style>
-        <p:txBody>
-          <a:bodyPr rtlCol="0" anchor="ctr"/>
-          <a:lstStyle/>
-          <a:p/>
-        </p:txBody>
-      </p:sp>
-      <p:sp>
-        <p:nvSpPr>
-          <p:cNvPr id="17556" name="TextBox 17555"/>
-          <p:cNvSpPr txBox="1"/>
-          <p:nvPr/>
-        </p:nvSpPr>
-        <p:spPr>
-          <a:xfrm>
-            <a:off x="9244584" y="5230367"/>
-            <a:ext cx="658368" cy="192024"/>
-          </a:xfrm>
-          <a:prstGeom prst="rect">
-            <a:avLst/>
-          </a:prstGeom>
-          <a:noFill/>
-        </p:spPr>
-        <p:txBody>
-          <a:bodyPr wrap="square" lIns="0" rIns="0" tIns="0" bIns="0" anchor="ctr"/>
-          <a:lstStyle/>
-          <a:p>
-            <a:pPr algn="ctr"/>
-            <a:r>
-              <a:rPr sz="720" i="0" b="1">
-                <a:solidFill>
-                  <a:srgbClr val="1B2533"/>
-                </a:solidFill>
-                <a:latin typeface="Segoe UI"/>
-                <a:ea typeface="Segoe UI"/>
-                <a:cs typeface="Segoe UI"/>
-              </a:rPr>
-              <a:t>TypeScript</a:t>
-            </a:r>
-          </a:p>
-        </p:txBody>
-      </p:sp>
-      <p:sp>
-        <p:nvSpPr>
-          <p:cNvPr id="17557" name="Rounded Rectangle 17556"/>
-          <p:cNvSpPr/>
-          <p:nvPr/>
-        </p:nvSpPr>
-        <p:spPr>
-          <a:xfrm>
-            <a:off x="9957815" y="5230367"/>
-            <a:ext cx="351129" cy="192024"/>
-          </a:xfrm>
-          <a:prstGeom prst="roundRect">
-            <a:avLst>
-              <a:gd name="adj" fmla="val 50000"/>
-            </a:avLst>
-          </a:prstGeom>
-          <a:solidFill>
-            <a:srgbClr val="ECE6F7"/>
-          </a:solidFill>
-          <a:ln>
-            <a:noFill/>
-          </a:ln>
-          <a:effectLst/>
-        </p:spPr>
-        <p:style>
-          <a:lnRef idx="1">
-            <a:schemeClr val="accent1"/>
-          </a:lnRef>
-          <a:fillRef idx="3">
-            <a:schemeClr val="accent1"/>
-          </a:fillRef>
-          <a:effectRef idx="2">
-            <a:schemeClr val="accent1"/>
-          </a:effectRef>
-          <a:fontRef idx="minor">
-            <a:schemeClr val="lt1"/>
-          </a:fontRef>
-        </p:style>
-        <p:txBody>
-          <a:bodyPr rtlCol="0" anchor="ctr"/>
-          <a:lstStyle/>
-          <a:p/>
-        </p:txBody>
-      </p:sp>
-      <p:sp>
-        <p:nvSpPr>
-          <p:cNvPr id="17558" name="TextBox 17557"/>
-          <p:cNvSpPr txBox="1"/>
-          <p:nvPr/>
-        </p:nvSpPr>
-        <p:spPr>
-          <a:xfrm>
-            <a:off x="9957815" y="5230367"/>
-            <a:ext cx="351129" cy="192024"/>
-          </a:xfrm>
-          <a:prstGeom prst="rect">
-            <a:avLst/>
-          </a:prstGeom>
-          <a:noFill/>
-        </p:spPr>
-        <p:txBody>
-          <a:bodyPr wrap="square" lIns="0" rIns="0" tIns="0" bIns="0" anchor="ctr"/>
-          <a:lstStyle/>
-          <a:p>
-            <a:pPr algn="ctr"/>
-            <a:r>
-              <a:rPr sz="720" i="0" b="1">
-                <a:solidFill>
-                  <a:srgbClr val="1B2533"/>
-                </a:solidFill>
-                <a:latin typeface="Segoe UI"/>
-                <a:ea typeface="Segoe UI"/>
-                <a:cs typeface="Segoe UI"/>
-              </a:rPr>
-              <a:t>Vite</a:t>
-            </a:r>
-          </a:p>
-        </p:txBody>
-      </p:sp>
-      <p:sp>
-        <p:nvSpPr>
-          <p:cNvPr id="17559" name="Rounded Rectangle 17558"/>
-          <p:cNvSpPr/>
-          <p:nvPr/>
-        </p:nvSpPr>
-        <p:spPr>
-          <a:xfrm>
-            <a:off x="10363809" y="5230367"/>
-            <a:ext cx="709574" cy="192024"/>
-          </a:xfrm>
-          <a:prstGeom prst="roundRect">
-            <a:avLst>
-              <a:gd name="adj" fmla="val 50000"/>
-            </a:avLst>
-          </a:prstGeom>
-          <a:solidFill>
-            <a:srgbClr val="ECE6F7"/>
-          </a:solidFill>
-          <a:ln>
-            <a:noFill/>
-          </a:ln>
-          <a:effectLst/>
-        </p:spPr>
-        <p:style>
-          <a:lnRef idx="1">
-            <a:schemeClr val="accent1"/>
-          </a:lnRef>
-          <a:fillRef idx="3">
-            <a:schemeClr val="accent1"/>
-          </a:fillRef>
-          <a:effectRef idx="2">
-            <a:schemeClr val="accent1"/>
-          </a:effectRef>
-          <a:fontRef idx="minor">
-            <a:schemeClr val="lt1"/>
-          </a:fontRef>
-        </p:style>
-        <p:txBody>
-          <a:bodyPr rtlCol="0" anchor="ctr"/>
-          <a:lstStyle/>
-          <a:p/>
-        </p:txBody>
-      </p:sp>
-      <p:sp>
-        <p:nvSpPr>
-          <p:cNvPr id="17560" name="TextBox 17559"/>
-          <p:cNvSpPr txBox="1"/>
-          <p:nvPr/>
-        </p:nvSpPr>
-        <p:spPr>
-          <a:xfrm>
-            <a:off x="10363809" y="5230367"/>
-            <a:ext cx="709574" cy="192024"/>
-          </a:xfrm>
-          <a:prstGeom prst="rect">
-            <a:avLst/>
-          </a:prstGeom>
-          <a:noFill/>
-        </p:spPr>
-        <p:txBody>
-          <a:bodyPr wrap="square" lIns="0" rIns="0" tIns="0" bIns="0" anchor="ctr"/>
-          <a:lstStyle/>
-          <a:p>
-            <a:pPr algn="ctr"/>
-            <a:r>
-              <a:rPr sz="720" i="0" b="1">
-                <a:solidFill>
-                  <a:srgbClr val="1B2533"/>
-                </a:solidFill>
-                <a:latin typeface="Segoe UI"/>
-                <a:ea typeface="Segoe UI"/>
-                <a:cs typeface="Segoe UI"/>
-              </a:rPr>
-              <a:t>MapLibre GL</a:t>
-            </a:r>
-          </a:p>
-        </p:txBody>
-      </p:sp>
-      <p:sp>
-        <p:nvSpPr>
-          <p:cNvPr id="17561" name="TextBox 17560"/>
-          <p:cNvSpPr txBox="1"/>
-          <p:nvPr/>
-        </p:nvSpPr>
-        <p:spPr>
-          <a:xfrm>
-            <a:off x="8787384" y="5495543"/>
-            <a:ext cx="3099815" cy="146304"/>
-          </a:xfrm>
-          <a:prstGeom prst="rect">
-            <a:avLst/>
-          </a:prstGeom>
-          <a:noFill/>
-        </p:spPr>
-        <p:txBody>
-          <a:bodyPr wrap="square" lIns="0" rIns="0" tIns="0" bIns="0" anchor="t"/>
-          <a:lstStyle/>
-          <a:p>
-            <a:pPr algn="l"/>
-            <a:r>
-              <a:rPr sz="700" i="0" b="1">
-                <a:solidFill>
-                  <a:srgbClr val="F37021"/>
-                </a:solidFill>
-                <a:latin typeface="Segoe UI"/>
-                <a:ea typeface="Segoe UI"/>
-                <a:cs typeface="Segoe UI"/>
-              </a:rPr>
-              <a:t>INFRA</a:t>
-            </a:r>
-          </a:p>
-        </p:txBody>
-      </p:sp>
-      <p:sp>
-        <p:nvSpPr>
-          <p:cNvPr id="17562" name="Rounded Rectangle 17561"/>
-          <p:cNvSpPr/>
-          <p:nvPr/>
-        </p:nvSpPr>
-        <p:spPr>
-          <a:xfrm>
-            <a:off x="8787384" y="5660135"/>
-            <a:ext cx="811987" cy="192024"/>
-          </a:xfrm>
-          <a:prstGeom prst="roundRect">
-            <a:avLst>
-              <a:gd name="adj" fmla="val 50000"/>
+              <a:gd name="adj" fmla="val 18000"/>
             </a:avLst>
           </a:prstGeom>
           <a:solidFill>
@@ -16991,14 +17592,14 @@
       </p:sp>
       <p:sp>
         <p:nvSpPr>
-          <p:cNvPr id="17563" name="TextBox 17562"/>
+          <p:cNvPr id="17582" name="TextBox 17581"/>
           <p:cNvSpPr txBox="1"/>
           <p:nvPr/>
         </p:nvSpPr>
         <p:spPr>
           <a:xfrm>
-            <a:off x="8787384" y="5660135"/>
-            <a:ext cx="811987" cy="192024"/>
+            <a:off x="11304269" y="5701284"/>
+            <a:ext cx="537209" cy="443484"/>
           </a:xfrm>
           <a:prstGeom prst="rect">
             <a:avLst/>
@@ -17009,9 +17610,13 @@
           <a:bodyPr wrap="square" lIns="0" rIns="0" tIns="0" bIns="0" anchor="ctr"/>
           <a:lstStyle/>
           <a:p>
-            <a:pPr algn="ctr"/>
-            <a:r>
-              <a:rPr sz="720" i="0" b="1">
+            <a:pPr algn="ctr">
+              <a:lnSpc>
+                <a:spcPct val="90000"/>
+              </a:lnSpc>
+            </a:pPr>
+            <a:r>
+              <a:rPr sz="680" i="0" b="1">
                 <a:solidFill>
                   <a:srgbClr val="1B2533"/>
                 </a:solidFill>
@@ -17019,165 +17624,7 @@
                 <a:ea typeface="Segoe UI"/>
                 <a:cs typeface="Segoe UI"/>
               </a:rPr>
-              <a:t>AWS Open Data</a:t>
-            </a:r>
-          </a:p>
-        </p:txBody>
-      </p:sp>
-      <p:sp>
-        <p:nvSpPr>
-          <p:cNvPr id="17564" name="Rounded Rectangle 17563"/>
-          <p:cNvSpPr/>
-          <p:nvPr/>
-        </p:nvSpPr>
-        <p:spPr>
-          <a:xfrm>
-            <a:off x="9654235" y="5660135"/>
-            <a:ext cx="965606" cy="192024"/>
-          </a:xfrm>
-          <a:prstGeom prst="roundRect">
-            <a:avLst>
-              <a:gd name="adj" fmla="val 50000"/>
-            </a:avLst>
-          </a:prstGeom>
-          <a:solidFill>
-            <a:srgbClr val="FDEBDD"/>
-          </a:solidFill>
-          <a:ln>
-            <a:noFill/>
-          </a:ln>
-          <a:effectLst/>
-        </p:spPr>
-        <p:style>
-          <a:lnRef idx="1">
-            <a:schemeClr val="accent1"/>
-          </a:lnRef>
-          <a:fillRef idx="3">
-            <a:schemeClr val="accent1"/>
-          </a:fillRef>
-          <a:effectRef idx="2">
-            <a:schemeClr val="accent1"/>
-          </a:effectRef>
-          <a:fontRef idx="minor">
-            <a:schemeClr val="lt1"/>
-          </a:fontRef>
-        </p:style>
-        <p:txBody>
-          <a:bodyPr rtlCol="0" anchor="ctr"/>
-          <a:lstStyle/>
-          <a:p/>
-        </p:txBody>
-      </p:sp>
-      <p:sp>
-        <p:nvSpPr>
-          <p:cNvPr id="17565" name="TextBox 17564"/>
-          <p:cNvSpPr txBox="1"/>
-          <p:nvPr/>
-        </p:nvSpPr>
-        <p:spPr>
-          <a:xfrm>
-            <a:off x="9654235" y="5660135"/>
-            <a:ext cx="965606" cy="192024"/>
-          </a:xfrm>
-          <a:prstGeom prst="rect">
-            <a:avLst/>
-          </a:prstGeom>
-          <a:noFill/>
-        </p:spPr>
-        <p:txBody>
-          <a:bodyPr wrap="square" lIns="0" rIns="0" tIns="0" bIns="0" anchor="ctr"/>
-          <a:lstStyle/>
-          <a:p>
-            <a:pPr algn="ctr"/>
-            <a:r>
-              <a:rPr sz="720" i="0" b="1">
-                <a:solidFill>
-                  <a:srgbClr val="1B2533"/>
-                </a:solidFill>
-                <a:latin typeface="Segoe UI"/>
-                <a:ea typeface="Segoe UI"/>
-                <a:cs typeface="Segoe UI"/>
-              </a:rPr>
-              <a:t>Cloudflare Pages</a:t>
-            </a:r>
-          </a:p>
-        </p:txBody>
-      </p:sp>
-      <p:sp>
-        <p:nvSpPr>
-          <p:cNvPr id="17566" name="Rounded Rectangle 17565"/>
-          <p:cNvSpPr/>
-          <p:nvPr/>
-        </p:nvSpPr>
-        <p:spPr>
-          <a:xfrm>
-            <a:off x="10674705" y="5660135"/>
-            <a:ext cx="1119225" cy="192024"/>
-          </a:xfrm>
-          <a:prstGeom prst="roundRect">
-            <a:avLst>
-              <a:gd name="adj" fmla="val 50000"/>
-            </a:avLst>
-          </a:prstGeom>
-          <a:solidFill>
-            <a:srgbClr val="FDEBDD"/>
-          </a:solidFill>
-          <a:ln>
-            <a:noFill/>
-          </a:ln>
-          <a:effectLst/>
-        </p:spPr>
-        <p:style>
-          <a:lnRef idx="1">
-            <a:schemeClr val="accent1"/>
-          </a:lnRef>
-          <a:fillRef idx="3">
-            <a:schemeClr val="accent1"/>
-          </a:fillRef>
-          <a:effectRef idx="2">
-            <a:schemeClr val="accent1"/>
-          </a:effectRef>
-          <a:fontRef idx="minor">
-            <a:schemeClr val="lt1"/>
-          </a:fontRef>
-        </p:style>
-        <p:txBody>
-          <a:bodyPr rtlCol="0" anchor="ctr"/>
-          <a:lstStyle/>
-          <a:p/>
-        </p:txBody>
-      </p:sp>
-      <p:sp>
-        <p:nvSpPr>
-          <p:cNvPr id="17567" name="TextBox 17566"/>
-          <p:cNvSpPr txBox="1"/>
-          <p:nvPr/>
-        </p:nvSpPr>
-        <p:spPr>
-          <a:xfrm>
-            <a:off x="10674705" y="5660135"/>
-            <a:ext cx="1119225" cy="192024"/>
-          </a:xfrm>
-          <a:prstGeom prst="rect">
-            <a:avLst/>
-          </a:prstGeom>
-          <a:noFill/>
-        </p:spPr>
-        <p:txBody>
-          <a:bodyPr wrap="square" lIns="0" rIns="0" tIns="0" bIns="0" anchor="ctr"/>
-          <a:lstStyle/>
-          <a:p>
-            <a:pPr algn="ctr"/>
-            <a:r>
-              <a:rPr sz="720" i="0" b="1">
-                <a:solidFill>
-                  <a:srgbClr val="1B2533"/>
-                </a:solidFill>
-                <a:latin typeface="Segoe UI"/>
-                <a:ea typeface="Segoe UI"/>
-                <a:cs typeface="Segoe UI"/>
-              </a:rPr>
-              <a:t>RTX 5060 Ti (16 GB)</a:t>
+              <a:t>one 16 GB GPU</a:t>
             </a:r>
           </a:p>
         </p:txBody>

--- a/SIH-PPT.pptx
+++ b/SIH-PPT.pptx
@@ -35565,7 +35565,7 @@
                 <a:ea typeface="Segoe UI"/>
                 <a:cs typeface="Segoe UI"/>
               </a:rPr>
-              <a:t>github.com/adit1290codesrank/sih2026</a:t>
+              <a:t>github.com/adit1290codesrank/tadit</a:t>
             </a:r>
           </a:p>
         </p:txBody>
